--- a/presentation/CDDE_Presentation.pptx
+++ b/presentation/CDDE_Presentation.pptx
@@ -11955,7 +11955,7 @@
         </p:nvSpPr>
         <p:spPr>
           <a:xfrm>
-            <a:off x="457200" y="1371600"/>
+            <a:off x="457200" y="1214851"/>
             <a:ext cx="2697480" cy="3200400"/>
           </a:xfrm>
           <a:prstGeom prst="rect">
@@ -12005,7 +12005,7 @@
         </p:blipFill>
         <p:spPr>
           <a:xfrm>
-            <a:off x="594360" y="1508760"/>
+            <a:off x="594360" y="1352011"/>
             <a:ext cx="320040" cy="320040"/>
           </a:xfrm>
           <a:prstGeom prst="rect">
@@ -12021,7 +12021,7 @@
         </p:nvSpPr>
         <p:spPr>
           <a:xfrm>
-            <a:off x="1005840" y="1508760"/>
+            <a:off x="1005840" y="1352011"/>
             <a:ext cx="2011680" cy="320040"/>
           </a:xfrm>
           <a:prstGeom prst="rect">
@@ -12060,7 +12060,7 @@
         </p:nvSpPr>
         <p:spPr>
           <a:xfrm>
-            <a:off x="594360" y="1965960"/>
+            <a:off x="594360" y="1809211"/>
             <a:ext cx="914400" cy="320040"/>
           </a:xfrm>
           <a:prstGeom prst="rect">
@@ -12103,7 +12103,7 @@
         </p:nvSpPr>
         <p:spPr>
           <a:xfrm>
-            <a:off x="1463040" y="1965960"/>
+            <a:off x="1463040" y="1809211"/>
             <a:ext cx="1554480" cy="320040"/>
           </a:xfrm>
           <a:prstGeom prst="rect">
@@ -12146,7 +12146,7 @@
         </p:nvSpPr>
         <p:spPr>
           <a:xfrm>
-            <a:off x="594360" y="2377440"/>
+            <a:off x="594360" y="2220691"/>
             <a:ext cx="914400" cy="320040"/>
           </a:xfrm>
           <a:prstGeom prst="rect">
@@ -12189,7 +12189,7 @@
         </p:nvSpPr>
         <p:spPr>
           <a:xfrm>
-            <a:off x="1463040" y="2377440"/>
+            <a:off x="1463040" y="2220691"/>
             <a:ext cx="1554480" cy="320040"/>
           </a:xfrm>
           <a:prstGeom prst="rect">
@@ -12276,7 +12276,7 @@
         </p:nvSpPr>
         <p:spPr>
           <a:xfrm>
-            <a:off x="594360" y="2788920"/>
+            <a:off x="594360" y="2632171"/>
             <a:ext cx="914400" cy="320040"/>
           </a:xfrm>
           <a:prstGeom prst="rect">
@@ -12319,7 +12319,7 @@
         </p:nvSpPr>
         <p:spPr>
           <a:xfrm>
-            <a:off x="1463040" y="2788920"/>
+            <a:off x="1463040" y="2632171"/>
             <a:ext cx="1554480" cy="320040"/>
           </a:xfrm>
           <a:prstGeom prst="rect">
@@ -12362,7 +12362,7 @@
         </p:nvSpPr>
         <p:spPr>
           <a:xfrm>
-            <a:off x="594360" y="3200400"/>
+            <a:off x="594360" y="3043651"/>
             <a:ext cx="914400" cy="320040"/>
           </a:xfrm>
           <a:prstGeom prst="rect">
@@ -12405,7 +12405,7 @@
         </p:nvSpPr>
         <p:spPr>
           <a:xfrm>
-            <a:off x="1463040" y="3200400"/>
+            <a:off x="1463040" y="3043651"/>
             <a:ext cx="1554480" cy="320040"/>
           </a:xfrm>
           <a:prstGeom prst="rect">
@@ -12448,7 +12448,7 @@
         </p:nvSpPr>
         <p:spPr>
           <a:xfrm>
-            <a:off x="594360" y="3611880"/>
+            <a:off x="594360" y="3455131"/>
             <a:ext cx="914400" cy="320040"/>
           </a:xfrm>
           <a:prstGeom prst="rect">
@@ -12491,7 +12491,7 @@
         </p:nvSpPr>
         <p:spPr>
           <a:xfrm>
-            <a:off x="1463040" y="3611880"/>
+            <a:off x="1463040" y="3455131"/>
             <a:ext cx="1554480" cy="320040"/>
           </a:xfrm>
           <a:prstGeom prst="rect">
@@ -12534,7 +12534,7 @@
         </p:nvSpPr>
         <p:spPr>
           <a:xfrm>
-            <a:off x="594360" y="4023360"/>
+            <a:off x="594360" y="3866611"/>
             <a:ext cx="914400" cy="320040"/>
           </a:xfrm>
           <a:prstGeom prst="rect">
@@ -12577,7 +12577,7 @@
         </p:nvSpPr>
         <p:spPr>
           <a:xfrm>
-            <a:off x="1463040" y="4023360"/>
+            <a:off x="1463040" y="3866611"/>
             <a:ext cx="1554480" cy="320040"/>
           </a:xfrm>
           <a:prstGeom prst="rect">
@@ -12620,7 +12620,7 @@
         </p:nvSpPr>
         <p:spPr>
           <a:xfrm>
-            <a:off x="3395980" y="1370330"/>
+            <a:off x="3395980" y="1213581"/>
             <a:ext cx="2697480" cy="3200400"/>
           </a:xfrm>
           <a:prstGeom prst="rect">
@@ -12670,7 +12670,7 @@
         </p:blipFill>
         <p:spPr>
           <a:xfrm>
-            <a:off x="3474720" y="1508760"/>
+            <a:off x="3474720" y="1352011"/>
             <a:ext cx="320040" cy="320040"/>
           </a:xfrm>
           <a:prstGeom prst="rect">
@@ -12686,7 +12686,7 @@
         </p:nvSpPr>
         <p:spPr>
           <a:xfrm>
-            <a:off x="3886200" y="1508760"/>
+            <a:off x="3886200" y="1352011"/>
             <a:ext cx="2011680" cy="320040"/>
           </a:xfrm>
           <a:prstGeom prst="rect">
@@ -12725,7 +12725,7 @@
         </p:nvSpPr>
         <p:spPr>
           <a:xfrm>
-            <a:off x="3474720" y="1965960"/>
+            <a:off x="3474720" y="1809211"/>
             <a:ext cx="914400" cy="320040"/>
           </a:xfrm>
           <a:prstGeom prst="rect">
@@ -12768,7 +12768,7 @@
         </p:nvSpPr>
         <p:spPr>
           <a:xfrm>
-            <a:off x="4343400" y="1965960"/>
+            <a:off x="4343400" y="1809211"/>
             <a:ext cx="1554480" cy="320040"/>
           </a:xfrm>
           <a:prstGeom prst="rect">
@@ -12811,7 +12811,7 @@
         </p:nvSpPr>
         <p:spPr>
           <a:xfrm>
-            <a:off x="3474720" y="2377440"/>
+            <a:off x="3474720" y="2220691"/>
             <a:ext cx="914400" cy="320040"/>
           </a:xfrm>
           <a:prstGeom prst="rect">
@@ -12854,7 +12854,7 @@
         </p:nvSpPr>
         <p:spPr>
           <a:xfrm>
-            <a:off x="4343400" y="2377440"/>
+            <a:off x="4343400" y="2220691"/>
             <a:ext cx="1554480" cy="320040"/>
           </a:xfrm>
           <a:prstGeom prst="rect">
@@ -12897,7 +12897,7 @@
         </p:nvSpPr>
         <p:spPr>
           <a:xfrm>
-            <a:off x="3474720" y="2788920"/>
+            <a:off x="3474720" y="2632171"/>
             <a:ext cx="914400" cy="320040"/>
           </a:xfrm>
           <a:prstGeom prst="rect">
@@ -12940,7 +12940,7 @@
         </p:nvSpPr>
         <p:spPr>
           <a:xfrm>
-            <a:off x="4343400" y="2788920"/>
+            <a:off x="4343400" y="2632171"/>
             <a:ext cx="1554480" cy="320040"/>
           </a:xfrm>
           <a:prstGeom prst="rect">
@@ -12980,7 +12980,7 @@
         </p:nvSpPr>
         <p:spPr>
           <a:xfrm>
-            <a:off x="3474720" y="3200400"/>
+            <a:off x="3474720" y="3043651"/>
             <a:ext cx="914400" cy="320040"/>
           </a:xfrm>
           <a:prstGeom prst="rect">
@@ -13023,7 +13023,7 @@
         </p:nvSpPr>
         <p:spPr>
           <a:xfrm>
-            <a:off x="4343400" y="3200400"/>
+            <a:off x="4343400" y="3043651"/>
             <a:ext cx="1554480" cy="320040"/>
           </a:xfrm>
           <a:prstGeom prst="rect">
@@ -13066,7 +13066,7 @@
         </p:nvSpPr>
         <p:spPr>
           <a:xfrm>
-            <a:off x="3474720" y="3611880"/>
+            <a:off x="3474720" y="3455131"/>
             <a:ext cx="914400" cy="320040"/>
           </a:xfrm>
           <a:prstGeom prst="rect">
@@ -13109,7 +13109,7 @@
         </p:nvSpPr>
         <p:spPr>
           <a:xfrm>
-            <a:off x="4343400" y="3611880"/>
+            <a:off x="4343400" y="3455131"/>
             <a:ext cx="1554480" cy="320040"/>
           </a:xfrm>
           <a:prstGeom prst="rect">
@@ -13152,7 +13152,7 @@
         </p:nvSpPr>
         <p:spPr>
           <a:xfrm>
-            <a:off x="3474720" y="4023360"/>
+            <a:off x="3474720" y="3866611"/>
             <a:ext cx="914400" cy="320040"/>
           </a:xfrm>
           <a:prstGeom prst="rect">
@@ -13195,7 +13195,7 @@
         </p:nvSpPr>
         <p:spPr>
           <a:xfrm>
-            <a:off x="4343400" y="4023360"/>
+            <a:off x="4343400" y="3866611"/>
             <a:ext cx="1554480" cy="320040"/>
           </a:xfrm>
           <a:prstGeom prst="rect">
@@ -13249,7 +13249,7 @@
         </p:nvSpPr>
         <p:spPr>
           <a:xfrm>
-            <a:off x="6217920" y="1371600"/>
+            <a:off x="6217920" y="1214851"/>
             <a:ext cx="2697480" cy="3200400"/>
           </a:xfrm>
           <a:prstGeom prst="rect">
@@ -13299,7 +13299,7 @@
         </p:blipFill>
         <p:spPr>
           <a:xfrm>
-            <a:off x="6355080" y="1508760"/>
+            <a:off x="6355080" y="1352011"/>
             <a:ext cx="320040" cy="320040"/>
           </a:xfrm>
           <a:prstGeom prst="rect">
@@ -13315,7 +13315,7 @@
         </p:nvSpPr>
         <p:spPr>
           <a:xfrm>
-            <a:off x="6766560" y="1508760"/>
+            <a:off x="6766560" y="1352011"/>
             <a:ext cx="2011680" cy="320040"/>
           </a:xfrm>
           <a:prstGeom prst="rect">
@@ -13354,7 +13354,7 @@
         </p:nvSpPr>
         <p:spPr>
           <a:xfrm>
-            <a:off x="6355080" y="1965960"/>
+            <a:off x="6355080" y="1809211"/>
             <a:ext cx="914400" cy="320040"/>
           </a:xfrm>
           <a:prstGeom prst="rect">
@@ -13397,7 +13397,7 @@
         </p:nvSpPr>
         <p:spPr>
           <a:xfrm>
-            <a:off x="7223760" y="1965960"/>
+            <a:off x="7223760" y="1809211"/>
             <a:ext cx="1554480" cy="320040"/>
           </a:xfrm>
           <a:prstGeom prst="rect">
@@ -13440,7 +13440,7 @@
         </p:nvSpPr>
         <p:spPr>
           <a:xfrm>
-            <a:off x="6355080" y="2377440"/>
+            <a:off x="6355080" y="2220691"/>
             <a:ext cx="914400" cy="320040"/>
           </a:xfrm>
           <a:prstGeom prst="rect">
@@ -13483,7 +13483,7 @@
         </p:nvSpPr>
         <p:spPr>
           <a:xfrm>
-            <a:off x="7223760" y="2377440"/>
+            <a:off x="7223760" y="2220691"/>
             <a:ext cx="1554480" cy="320040"/>
           </a:xfrm>
           <a:prstGeom prst="rect">
@@ -13526,7 +13526,7 @@
         </p:nvSpPr>
         <p:spPr>
           <a:xfrm>
-            <a:off x="6355080" y="2788920"/>
+            <a:off x="6355080" y="2632171"/>
             <a:ext cx="914400" cy="320040"/>
           </a:xfrm>
           <a:prstGeom prst="rect">
@@ -13569,7 +13569,7 @@
         </p:nvSpPr>
         <p:spPr>
           <a:xfrm>
-            <a:off x="7223760" y="2788920"/>
+            <a:off x="7223760" y="2632171"/>
             <a:ext cx="1554480" cy="320040"/>
           </a:xfrm>
           <a:prstGeom prst="rect">
@@ -13612,7 +13612,7 @@
         </p:nvSpPr>
         <p:spPr>
           <a:xfrm>
-            <a:off x="6355080" y="3200400"/>
+            <a:off x="6355080" y="3043651"/>
             <a:ext cx="914400" cy="320040"/>
           </a:xfrm>
           <a:prstGeom prst="rect">
@@ -13655,7 +13655,7 @@
         </p:nvSpPr>
         <p:spPr>
           <a:xfrm>
-            <a:off x="7223760" y="3200400"/>
+            <a:off x="7223760" y="3043651"/>
             <a:ext cx="1554480" cy="320040"/>
           </a:xfrm>
           <a:prstGeom prst="rect">
@@ -13698,7 +13698,7 @@
         </p:nvSpPr>
         <p:spPr>
           <a:xfrm>
-            <a:off x="6355080" y="3611880"/>
+            <a:off x="6355080" y="3455131"/>
             <a:ext cx="914400" cy="320040"/>
           </a:xfrm>
           <a:prstGeom prst="rect">
@@ -13741,7 +13741,7 @@
         </p:nvSpPr>
         <p:spPr>
           <a:xfrm>
-            <a:off x="7223760" y="3611880"/>
+            <a:off x="7223760" y="3455131"/>
             <a:ext cx="1554480" cy="320040"/>
           </a:xfrm>
           <a:prstGeom prst="rect">
@@ -13784,7 +13784,7 @@
         </p:nvSpPr>
         <p:spPr>
           <a:xfrm>
-            <a:off x="6355080" y="4023360"/>
+            <a:off x="6355080" y="3866611"/>
             <a:ext cx="914400" cy="320040"/>
           </a:xfrm>
           <a:prstGeom prst="rect">
@@ -13827,7 +13827,7 @@
         </p:nvSpPr>
         <p:spPr>
           <a:xfrm>
-            <a:off x="7223760" y="4023360"/>
+            <a:off x="7223760" y="3866611"/>
             <a:ext cx="1554480" cy="320040"/>
           </a:xfrm>
           <a:prstGeom prst="rect">
@@ -13878,8 +13878,8 @@
         </p:nvSpPr>
         <p:spPr>
           <a:xfrm>
-            <a:off x="548640" y="4709160"/>
-            <a:ext cx="8046720" cy="320040"/>
+            <a:off x="548640" y="4484562"/>
+            <a:ext cx="8046720" cy="658938"/>
           </a:xfrm>
           <a:prstGeom prst="rect">
             <a:avLst/>
@@ -13891,9 +13891,6 @@
           <a:bodyPr wrap="square" lIns="0" tIns="0" rIns="0" bIns="0" rtlCol="0" anchor="ctr"/>
           <a:lstStyle/>
           <a:p>
-            <a:pPr marL="0" indent="0">
-              <a:buNone/>
-            </a:pPr>
             <a:r>
               <a:rPr lang="en-US" sz="1100" b="1" dirty="0">
                 <a:solidFill>
@@ -13903,7 +13900,55 @@
                 <a:ea typeface="Calibri" pitchFamily="34" charset="-122"/>
                 <a:cs typeface="Calibri" pitchFamily="34" charset="-120"/>
               </a:rPr>
-              <a:t>Backend is stateless — all state in PostgreSQL. Horizontal scale = add replicas. Zero code changes.</a:t>
+              <a:t>State persisted to PostgreSQL. </a:t>
+            </a:r>
+          </a:p>
+          <a:p>
+            <a:r>
+              <a:rPr lang="en-US" sz="1100" b="1" dirty="0">
+                <a:solidFill>
+                  <a:srgbClr val="3A4F6A"/>
+                </a:solidFill>
+                <a:latin typeface="Calibri" pitchFamily="34" charset="0"/>
+                <a:ea typeface="Calibri" pitchFamily="34" charset="-122"/>
+                <a:cs typeface="Calibri" pitchFamily="34" charset="-120"/>
+              </a:rPr>
+              <a:t>Small-scale prod: sticky sessions + replicas. </a:t>
+            </a:r>
+          </a:p>
+          <a:p>
+            <a:r>
+              <a:rPr lang="en-US" sz="1100" b="1" dirty="0">
+                <a:solidFill>
+                  <a:srgbClr val="3A4F6A"/>
+                </a:solidFill>
+                <a:latin typeface="Calibri" pitchFamily="34" charset="0"/>
+                <a:ea typeface="Calibri" pitchFamily="34" charset="-122"/>
+                <a:cs typeface="Calibri" pitchFamily="34" charset="-120"/>
+              </a:rPr>
+              <a:t>Large-scale: HITL events move from in-process </a:t>
+            </a:r>
+            <a:r>
+              <a:rPr lang="en-US" sz="1100" b="1" dirty="0" err="1">
+                <a:solidFill>
+                  <a:srgbClr val="3A4F6A"/>
+                </a:solidFill>
+                <a:latin typeface="Calibri" pitchFamily="34" charset="0"/>
+                <a:ea typeface="Calibri" pitchFamily="34" charset="-122"/>
+                <a:cs typeface="Calibri" pitchFamily="34" charset="-120"/>
+              </a:rPr>
+              <a:t>asyncio.Event</a:t>
+            </a:r>
+            <a:r>
+              <a:rPr lang="en-US" sz="1100" b="1" dirty="0">
+                <a:solidFill>
+                  <a:srgbClr val="3A4F6A"/>
+                </a:solidFill>
+                <a:latin typeface="Calibri" pitchFamily="34" charset="0"/>
+                <a:ea typeface="Calibri" pitchFamily="34" charset="-122"/>
+                <a:cs typeface="Calibri" pitchFamily="34" charset="-120"/>
+              </a:rPr>
+              <a:t> to DB polling — contained change, same interfaces.</a:t>
             </a:r>
             <a:endParaRPr lang="en-US" sz="1100" dirty="0">
               <a:solidFill>
@@ -13927,7 +13972,7 @@
         </p:nvSpPr>
         <p:spPr>
           <a:xfrm>
-            <a:off x="442214" y="1371600"/>
+            <a:off x="442214" y="1214851"/>
             <a:ext cx="54864" cy="3200400"/>
           </a:xfrm>
           <a:prstGeom prst="rect">
@@ -13960,7 +14005,7 @@
         </p:nvSpPr>
         <p:spPr>
           <a:xfrm>
-            <a:off x="3341116" y="1370330"/>
+            <a:off x="3341116" y="1213581"/>
             <a:ext cx="54864" cy="3200400"/>
           </a:xfrm>
           <a:prstGeom prst="rect">
@@ -13993,7 +14038,7 @@
         </p:nvSpPr>
         <p:spPr>
           <a:xfrm>
-            <a:off x="6208776" y="1370330"/>
+            <a:off x="6208776" y="1213581"/>
             <a:ext cx="54864" cy="3200400"/>
           </a:xfrm>
           <a:prstGeom prst="rect">
@@ -22199,48 +22244,14 @@
       </p:sp>
       <p:sp>
         <p:nvSpPr>
-          <p:cNvPr id="7" name="Shape 5"/>
-          <p:cNvSpPr/>
-          <p:nvPr/>
-        </p:nvSpPr>
-        <p:spPr>
-          <a:xfrm>
-            <a:off x="548640" y="1920240"/>
-            <a:ext cx="4206240" cy="411480"/>
-          </a:xfrm>
-          <a:prstGeom prst="rect">
-            <a:avLst/>
-          </a:prstGeom>
-          <a:solidFill>
-            <a:srgbClr val="FFFFFF"/>
-          </a:solidFill>
-          <a:ln/>
-          <a:effectLst>
-            <a:outerShdw blurRad="50800" dist="25400" dir="8100000" algn="bl" rotWithShape="0">
-              <a:srgbClr val="000000">
-                <a:alpha val="10000"/>
-              </a:srgbClr>
-            </a:outerShdw>
-          </a:effectLst>
-        </p:spPr>
-        <p:txBody>
-          <a:bodyPr/>
-          <a:lstStyle/>
-          <a:p>
-            <a:endParaRPr lang="en-CA"/>
-          </a:p>
-        </p:txBody>
-      </p:sp>
-      <p:sp>
-        <p:nvSpPr>
-          <p:cNvPr id="8" name="Text 6"/>
-          <p:cNvSpPr/>
-          <p:nvPr/>
-        </p:nvSpPr>
-        <p:spPr>
-          <a:xfrm>
-            <a:off x="731520" y="1920240"/>
-            <a:ext cx="3840480" cy="411480"/>
+          <p:cNvPr id="15" name="Text 13"/>
+          <p:cNvSpPr/>
+          <p:nvPr/>
+        </p:nvSpPr>
+        <p:spPr>
+          <a:xfrm>
+            <a:off x="5120640" y="960120"/>
+            <a:ext cx="3657600" cy="320040"/>
           </a:xfrm>
           <a:prstGeom prst="rect">
             <a:avLst/>
@@ -22256,45 +22267,38 @@
               <a:buNone/>
             </a:pPr>
             <a:r>
-              <a:rPr lang="en-US" sz="1050" dirty="0">
-                <a:solidFill>
-                  <a:srgbClr val="1E293B"/>
+              <a:rPr lang="en-US" sz="1400" b="1" dirty="0">
+                <a:solidFill>
+                  <a:srgbClr val="0F1B2D"/>
                 </a:solidFill>
                 <a:latin typeface="Calibri" pitchFamily="34" charset="0"/>
                 <a:ea typeface="Calibri" pitchFamily="34" charset="-122"/>
                 <a:cs typeface="Calibri" pitchFamily="34" charset="-120"/>
               </a:rPr>
-              <a:t>YAML specs only — production needs PDF/Word parsing</a:t>
-            </a:r>
-            <a:endParaRPr lang="en-US" sz="1050" dirty="0"/>
-          </a:p>
-        </p:txBody>
-      </p:sp>
-      <p:sp>
-        <p:nvSpPr>
-          <p:cNvPr id="9" name="Shape 7"/>
-          <p:cNvSpPr/>
-          <p:nvPr/>
-        </p:nvSpPr>
-        <p:spPr>
-          <a:xfrm>
-            <a:off x="548640" y="2423160"/>
-            <a:ext cx="4206240" cy="411480"/>
-          </a:xfrm>
-          <a:prstGeom prst="rect">
+              <a:t>What We Could Build Next</a:t>
+            </a:r>
+            <a:endParaRPr lang="en-US" sz="1400" dirty="0"/>
+          </a:p>
+        </p:txBody>
+      </p:sp>
+      <p:sp>
+        <p:nvSpPr>
+          <p:cNvPr id="16" name="Shape 14"/>
+          <p:cNvSpPr/>
+          <p:nvPr/>
+        </p:nvSpPr>
+        <p:spPr>
+          <a:xfrm>
+            <a:off x="5120640" y="1463040"/>
+            <a:ext cx="320040" cy="320040"/>
+          </a:xfrm>
+          <a:prstGeom prst="ellipse">
             <a:avLst/>
           </a:prstGeom>
           <a:solidFill>
-            <a:srgbClr val="FFFFFF"/>
+            <a:srgbClr val="E86F33"/>
           </a:solidFill>
           <a:ln/>
-          <a:effectLst>
-            <a:outerShdw blurRad="50800" dist="25400" dir="8100000" algn="bl" rotWithShape="0">
-              <a:srgbClr val="000000">
-                <a:alpha val="10000"/>
-              </a:srgbClr>
-            </a:outerShdw>
-          </a:effectLst>
         </p:spPr>
         <p:txBody>
           <a:bodyPr/>
@@ -22306,14 +22310,53 @@
       </p:sp>
       <p:sp>
         <p:nvSpPr>
-          <p:cNvPr id="10" name="Text 8"/>
-          <p:cNvSpPr/>
-          <p:nvPr/>
-        </p:nvSpPr>
-        <p:spPr>
-          <a:xfrm>
-            <a:off x="731520" y="2423160"/>
-            <a:ext cx="3840480" cy="411480"/>
+          <p:cNvPr id="17" name="Text 15"/>
+          <p:cNvSpPr/>
+          <p:nvPr/>
+        </p:nvSpPr>
+        <p:spPr>
+          <a:xfrm>
+            <a:off x="5120640" y="1463040"/>
+            <a:ext cx="320040" cy="320040"/>
+          </a:xfrm>
+          <a:prstGeom prst="rect">
+            <a:avLst/>
+          </a:prstGeom>
+          <a:noFill/>
+          <a:ln/>
+        </p:spPr>
+        <p:txBody>
+          <a:bodyPr wrap="square" lIns="0" tIns="0" rIns="0" bIns="0" rtlCol="0" anchor="ctr"/>
+          <a:lstStyle/>
+          <a:p>
+            <a:pPr marL="0" indent="0" algn="ctr">
+              <a:buNone/>
+            </a:pPr>
+            <a:r>
+              <a:rPr lang="en-US" sz="1400" b="1" dirty="0">
+                <a:solidFill>
+                  <a:srgbClr val="FFFFFF"/>
+                </a:solidFill>
+                <a:latin typeface="Georgia" pitchFamily="34" charset="0"/>
+                <a:ea typeface="Georgia" pitchFamily="34" charset="-122"/>
+                <a:cs typeface="Georgia" pitchFamily="34" charset="-120"/>
+              </a:rPr>
+              <a:t>1</a:t>
+            </a:r>
+            <a:endParaRPr lang="en-US" sz="1400" dirty="0"/>
+          </a:p>
+        </p:txBody>
+      </p:sp>
+      <p:sp>
+        <p:nvSpPr>
+          <p:cNvPr id="18" name="Text 16"/>
+          <p:cNvSpPr/>
+          <p:nvPr/>
+        </p:nvSpPr>
+        <p:spPr>
+          <a:xfrm>
+            <a:off x="5577840" y="1417320"/>
+            <a:ext cx="3200400" cy="457200"/>
           </a:xfrm>
           <a:prstGeom prst="rect">
             <a:avLst/>
@@ -22337,7 +22380,7 @@
                 <a:ea typeface="Calibri" pitchFamily="34" charset="-122"/>
                 <a:cs typeface="Calibri" pitchFamily="34" charset="-120"/>
               </a:rPr>
-              <a:t>Single study — memory architecture supports multi-study</a:t>
+              <a:t>BDS support (ADAE, ADLB — one row per patient/visit/parameter)</a:t>
             </a:r>
             <a:endParaRPr lang="en-US" sz="1050" dirty="0"/>
           </a:p>
@@ -22345,29 +22388,22 @@
       </p:sp>
       <p:sp>
         <p:nvSpPr>
-          <p:cNvPr id="11" name="Shape 9"/>
-          <p:cNvSpPr/>
-          <p:nvPr/>
-        </p:nvSpPr>
-        <p:spPr>
-          <a:xfrm>
-            <a:off x="548640" y="2926080"/>
-            <a:ext cx="4206240" cy="411480"/>
-          </a:xfrm>
-          <a:prstGeom prst="rect">
+          <p:cNvPr id="19" name="Shape 17"/>
+          <p:cNvSpPr/>
+          <p:nvPr/>
+        </p:nvSpPr>
+        <p:spPr>
+          <a:xfrm>
+            <a:off x="5120640" y="2018213"/>
+            <a:ext cx="320040" cy="320040"/>
+          </a:xfrm>
+          <a:prstGeom prst="ellipse">
             <a:avLst/>
           </a:prstGeom>
           <a:solidFill>
-            <a:srgbClr val="FFFFFF"/>
+            <a:srgbClr val="E86F33"/>
           </a:solidFill>
           <a:ln/>
-          <a:effectLst>
-            <a:outerShdw blurRad="50800" dist="25400" dir="8100000" algn="bl" rotWithShape="0">
-              <a:srgbClr val="000000">
-                <a:alpha val="10000"/>
-              </a:srgbClr>
-            </a:outerShdw>
-          </a:effectLst>
         </p:spPr>
         <p:txBody>
           <a:bodyPr/>
@@ -22379,14 +22415,53 @@
       </p:sp>
       <p:sp>
         <p:nvSpPr>
-          <p:cNvPr id="12" name="Text 10"/>
-          <p:cNvSpPr/>
-          <p:nvPr/>
-        </p:nvSpPr>
-        <p:spPr>
-          <a:xfrm>
-            <a:off x="731520" y="2926080"/>
-            <a:ext cx="3840480" cy="411480"/>
+          <p:cNvPr id="20" name="Text 18"/>
+          <p:cNvSpPr/>
+          <p:nvPr/>
+        </p:nvSpPr>
+        <p:spPr>
+          <a:xfrm>
+            <a:off x="5120640" y="2018213"/>
+            <a:ext cx="320040" cy="320040"/>
+          </a:xfrm>
+          <a:prstGeom prst="rect">
+            <a:avLst/>
+          </a:prstGeom>
+          <a:noFill/>
+          <a:ln/>
+        </p:spPr>
+        <p:txBody>
+          <a:bodyPr wrap="square" lIns="0" tIns="0" rIns="0" bIns="0" rtlCol="0" anchor="ctr"/>
+          <a:lstStyle/>
+          <a:p>
+            <a:pPr marL="0" indent="0" algn="ctr">
+              <a:buNone/>
+            </a:pPr>
+            <a:r>
+              <a:rPr lang="en-US" sz="1400" b="1" dirty="0">
+                <a:solidFill>
+                  <a:srgbClr val="FFFFFF"/>
+                </a:solidFill>
+                <a:latin typeface="Georgia" pitchFamily="34" charset="0"/>
+                <a:ea typeface="Georgia" pitchFamily="34" charset="-122"/>
+                <a:cs typeface="Georgia" pitchFamily="34" charset="-120"/>
+              </a:rPr>
+              <a:t>2</a:t>
+            </a:r>
+            <a:endParaRPr lang="en-US" sz="1400" dirty="0"/>
+          </a:p>
+        </p:txBody>
+      </p:sp>
+      <p:sp>
+        <p:nvSpPr>
+          <p:cNvPr id="21" name="Text 19"/>
+          <p:cNvSpPr/>
+          <p:nvPr/>
+        </p:nvSpPr>
+        <p:spPr>
+          <a:xfrm>
+            <a:off x="5577840" y="1972493"/>
+            <a:ext cx="3200400" cy="457200"/>
           </a:xfrm>
           <a:prstGeom prst="rect">
             <a:avLst/>
@@ -22410,7 +22485,7 @@
                 <a:ea typeface="Calibri" pitchFamily="34" charset="-122"/>
                 <a:cs typeface="Calibri" pitchFamily="34" charset="-120"/>
               </a:rPr>
-              <a:t>No CDISC conformance — Pinnacle 21 integration needed</a:t>
+              <a:t>PDF spec parsing (SAP → YAML → engine) using a real LLM agent</a:t>
             </a:r>
             <a:endParaRPr lang="en-US" sz="1050" dirty="0"/>
           </a:p>
@@ -22418,29 +22493,22 @@
       </p:sp>
       <p:sp>
         <p:nvSpPr>
-          <p:cNvPr id="13" name="Shape 11"/>
-          <p:cNvSpPr/>
-          <p:nvPr/>
-        </p:nvSpPr>
-        <p:spPr>
-          <a:xfrm>
-            <a:off x="548640" y="3429000"/>
-            <a:ext cx="4206240" cy="411480"/>
-          </a:xfrm>
-          <a:prstGeom prst="rect">
+          <p:cNvPr id="22" name="Shape 20"/>
+          <p:cNvSpPr/>
+          <p:nvPr/>
+        </p:nvSpPr>
+        <p:spPr>
+          <a:xfrm>
+            <a:off x="5120640" y="2599510"/>
+            <a:ext cx="320040" cy="320040"/>
+          </a:xfrm>
+          <a:prstGeom prst="ellipse">
             <a:avLst/>
           </a:prstGeom>
           <a:solidFill>
-            <a:srgbClr val="FFFFFF"/>
+            <a:srgbClr val="E86F33"/>
           </a:solidFill>
           <a:ln/>
-          <a:effectLst>
-            <a:outerShdw blurRad="50800" dist="25400" dir="8100000" algn="bl" rotWithShape="0">
-              <a:srgbClr val="000000">
-                <a:alpha val="10000"/>
-              </a:srgbClr>
-            </a:outerShdw>
-          </a:effectLst>
         </p:spPr>
         <p:txBody>
           <a:bodyPr/>
@@ -22452,14 +22520,14 @@
       </p:sp>
       <p:sp>
         <p:nvSpPr>
-          <p:cNvPr id="14" name="Text 12"/>
-          <p:cNvSpPr/>
-          <p:nvPr/>
-        </p:nvSpPr>
-        <p:spPr>
-          <a:xfrm>
-            <a:off x="731520" y="3429000"/>
-            <a:ext cx="3840480" cy="411480"/>
+          <p:cNvPr id="23" name="Text 21"/>
+          <p:cNvSpPr/>
+          <p:nvPr/>
+        </p:nvSpPr>
+        <p:spPr>
+          <a:xfrm>
+            <a:off x="5120640" y="2599510"/>
+            <a:ext cx="320040" cy="320040"/>
           </a:xfrm>
           <a:prstGeom prst="rect">
             <a:avLst/>
@@ -22471,6 +22539,48 @@
           <a:bodyPr wrap="square" lIns="0" tIns="0" rIns="0" bIns="0" rtlCol="0" anchor="ctr"/>
           <a:lstStyle/>
           <a:p>
+            <a:pPr marL="0" indent="0" algn="ctr">
+              <a:buNone/>
+            </a:pPr>
+            <a:r>
+              <a:rPr lang="en-US" sz="1400" b="1" dirty="0">
+                <a:solidFill>
+                  <a:srgbClr val="FFFFFF"/>
+                </a:solidFill>
+                <a:latin typeface="Georgia" pitchFamily="34" charset="0"/>
+                <a:ea typeface="Georgia" pitchFamily="34" charset="-122"/>
+                <a:cs typeface="Georgia" pitchFamily="34" charset="-120"/>
+              </a:rPr>
+              <a:t>3</a:t>
+            </a:r>
+            <a:endParaRPr lang="en-US" sz="1400" dirty="0"/>
+          </a:p>
+        </p:txBody>
+      </p:sp>
+      <p:sp>
+        <p:nvSpPr>
+          <p:cNvPr id="24" name="Text 22"/>
+          <p:cNvSpPr/>
+          <p:nvPr/>
+        </p:nvSpPr>
+        <p:spPr>
+          <a:xfrm>
+            <a:off x="5577840" y="2553790"/>
+            <a:ext cx="3200400" cy="457200"/>
+          </a:xfrm>
+          <a:prstGeom prst="rect">
+            <a:avLst/>
+          </a:prstGeom>
+          <a:noFill/>
+          <a:ln/>
+        </p:spPr>
+        <p:txBody>
+          <a:bodyPr wrap="square" lIns="0" tIns="0" rIns="0" bIns="0" rtlCol="0" anchor="ctr"/>
+          <a:lstStyle/>
+          <a:p>
+            <a:pPr marL="0" indent="0">
+              <a:buNone/>
+            </a:pPr>
             <a:r>
               <a:rPr lang="en-US" sz="1050" dirty="0">
                 <a:solidFill>
@@ -22480,7 +22590,7 @@
                 <a:ea typeface="Calibri" pitchFamily="34" charset="-122"/>
                 <a:cs typeface="Calibri" pitchFamily="34" charset="-120"/>
               </a:rPr>
-              <a:t>Current guards are rule-based (</a:t>
+              <a:t>Multi-study pattern learning (cross-study long-term memory) + </a:t>
             </a:r>
             <a:r>
               <a:rPr lang="en-US" sz="1050" dirty="0" err="1">
@@ -22491,7 +22601,7 @@
                 <a:ea typeface="Calibri" pitchFamily="34" charset="-122"/>
                 <a:cs typeface="Calibri" pitchFamily="34" charset="-120"/>
               </a:rPr>
-              <a:t>AgentLens</a:t>
+              <a:t>dedup</a:t>
             </a:r>
             <a:r>
               <a:rPr lang="en-US" sz="1050" dirty="0">
@@ -22502,7 +22612,7 @@
                 <a:ea typeface="Calibri" pitchFamily="34" charset="-122"/>
                 <a:cs typeface="Calibri" pitchFamily="34" charset="-120"/>
               </a:rPr>
-              <a:t> proxy + custom rules)</a:t>
+              <a:t> for queries</a:t>
             </a:r>
             <a:endParaRPr lang="en-US" sz="1050" dirty="0"/>
           </a:p>
@@ -22510,52 +22620,13 @@
       </p:sp>
       <p:sp>
         <p:nvSpPr>
-          <p:cNvPr id="15" name="Text 13"/>
-          <p:cNvSpPr/>
-          <p:nvPr/>
-        </p:nvSpPr>
-        <p:spPr>
-          <a:xfrm>
-            <a:off x="5120640" y="960120"/>
-            <a:ext cx="3657600" cy="320040"/>
-          </a:xfrm>
-          <a:prstGeom prst="rect">
-            <a:avLst/>
-          </a:prstGeom>
-          <a:noFill/>
-          <a:ln/>
-        </p:spPr>
-        <p:txBody>
-          <a:bodyPr wrap="square" lIns="0" tIns="0" rIns="0" bIns="0" rtlCol="0" anchor="ctr"/>
-          <a:lstStyle/>
-          <a:p>
-            <a:pPr marL="0" indent="0">
-              <a:buNone/>
-            </a:pPr>
-            <a:r>
-              <a:rPr lang="en-US" sz="1400" b="1" dirty="0">
-                <a:solidFill>
-                  <a:srgbClr val="0F1B2D"/>
-                </a:solidFill>
-                <a:latin typeface="Calibri" pitchFamily="34" charset="0"/>
-                <a:ea typeface="Calibri" pitchFamily="34" charset="-122"/>
-                <a:cs typeface="Calibri" pitchFamily="34" charset="-120"/>
-              </a:rPr>
-              <a:t>What We Could Build Next</a:t>
-            </a:r>
-            <a:endParaRPr lang="en-US" sz="1400" dirty="0"/>
-          </a:p>
-        </p:txBody>
-      </p:sp>
-      <p:sp>
-        <p:nvSpPr>
-          <p:cNvPr id="16" name="Shape 14"/>
-          <p:cNvSpPr/>
-          <p:nvPr/>
-        </p:nvSpPr>
-        <p:spPr>
-          <a:xfrm>
-            <a:off x="5120640" y="1463040"/>
+          <p:cNvPr id="25" name="Shape 23"/>
+          <p:cNvSpPr/>
+          <p:nvPr/>
+        </p:nvSpPr>
+        <p:spPr>
+          <a:xfrm>
+            <a:off x="5120640" y="3193875"/>
             <a:ext cx="320040" cy="320040"/>
           </a:xfrm>
           <a:prstGeom prst="ellipse">
@@ -22576,13 +22647,13 @@
       </p:sp>
       <p:sp>
         <p:nvSpPr>
-          <p:cNvPr id="17" name="Text 15"/>
-          <p:cNvSpPr/>
-          <p:nvPr/>
-        </p:nvSpPr>
-        <p:spPr>
-          <a:xfrm>
-            <a:off x="5120640" y="1463040"/>
+          <p:cNvPr id="26" name="Text 24"/>
+          <p:cNvSpPr/>
+          <p:nvPr/>
+        </p:nvSpPr>
+        <p:spPr>
+          <a:xfrm>
+            <a:off x="5120640" y="3193875"/>
             <a:ext cx="320040" cy="320040"/>
           </a:xfrm>
           <a:prstGeom prst="rect">
@@ -22607,7 +22678,7 @@
                 <a:ea typeface="Georgia" pitchFamily="34" charset="-122"/>
                 <a:cs typeface="Georgia" pitchFamily="34" charset="-120"/>
               </a:rPr>
-              <a:t>1</a:t>
+              <a:t>4</a:t>
             </a:r>
             <a:endParaRPr lang="en-US" sz="1400" dirty="0"/>
           </a:p>
@@ -22615,328 +22686,13 @@
       </p:sp>
       <p:sp>
         <p:nvSpPr>
-          <p:cNvPr id="18" name="Text 16"/>
-          <p:cNvSpPr/>
-          <p:nvPr/>
-        </p:nvSpPr>
-        <p:spPr>
-          <a:xfrm>
-            <a:off x="5577840" y="1417320"/>
-            <a:ext cx="3200400" cy="457200"/>
-          </a:xfrm>
-          <a:prstGeom prst="rect">
-            <a:avLst/>
-          </a:prstGeom>
-          <a:noFill/>
-          <a:ln/>
-        </p:spPr>
-        <p:txBody>
-          <a:bodyPr wrap="square" lIns="0" tIns="0" rIns="0" bIns="0" rtlCol="0" anchor="ctr"/>
-          <a:lstStyle/>
-          <a:p>
-            <a:pPr marL="0" indent="0">
-              <a:buNone/>
-            </a:pPr>
-            <a:r>
-              <a:rPr lang="en-US" sz="1050" dirty="0">
-                <a:solidFill>
-                  <a:srgbClr val="1E293B"/>
-                </a:solidFill>
-                <a:latin typeface="Calibri" pitchFamily="34" charset="0"/>
-                <a:ea typeface="Calibri" pitchFamily="34" charset="-122"/>
-                <a:cs typeface="Calibri" pitchFamily="34" charset="-120"/>
-              </a:rPr>
-              <a:t>BDS support (ADAE, ADLB — one row per patient/visit/parameter)</a:t>
-            </a:r>
-            <a:endParaRPr lang="en-US" sz="1050" dirty="0"/>
-          </a:p>
-        </p:txBody>
-      </p:sp>
-      <p:sp>
-        <p:nvSpPr>
-          <p:cNvPr id="19" name="Shape 17"/>
-          <p:cNvSpPr/>
-          <p:nvPr/>
-        </p:nvSpPr>
-        <p:spPr>
-          <a:xfrm>
-            <a:off x="5120640" y="2103120"/>
-            <a:ext cx="320040" cy="320040"/>
-          </a:xfrm>
-          <a:prstGeom prst="ellipse">
-            <a:avLst/>
-          </a:prstGeom>
-          <a:solidFill>
-            <a:srgbClr val="E86F33"/>
-          </a:solidFill>
-          <a:ln/>
-        </p:spPr>
-        <p:txBody>
-          <a:bodyPr/>
-          <a:lstStyle/>
-          <a:p>
-            <a:endParaRPr lang="en-CA"/>
-          </a:p>
-        </p:txBody>
-      </p:sp>
-      <p:sp>
-        <p:nvSpPr>
-          <p:cNvPr id="20" name="Text 18"/>
-          <p:cNvSpPr/>
-          <p:nvPr/>
-        </p:nvSpPr>
-        <p:spPr>
-          <a:xfrm>
-            <a:off x="5120640" y="2103120"/>
-            <a:ext cx="320040" cy="320040"/>
-          </a:xfrm>
-          <a:prstGeom prst="rect">
-            <a:avLst/>
-          </a:prstGeom>
-          <a:noFill/>
-          <a:ln/>
-        </p:spPr>
-        <p:txBody>
-          <a:bodyPr wrap="square" lIns="0" tIns="0" rIns="0" bIns="0" rtlCol="0" anchor="ctr"/>
-          <a:lstStyle/>
-          <a:p>
-            <a:pPr marL="0" indent="0" algn="ctr">
-              <a:buNone/>
-            </a:pPr>
-            <a:r>
-              <a:rPr lang="en-US" sz="1400" b="1" dirty="0">
-                <a:solidFill>
-                  <a:srgbClr val="FFFFFF"/>
-                </a:solidFill>
-                <a:latin typeface="Georgia" pitchFamily="34" charset="0"/>
-                <a:ea typeface="Georgia" pitchFamily="34" charset="-122"/>
-                <a:cs typeface="Georgia" pitchFamily="34" charset="-120"/>
-              </a:rPr>
-              <a:t>2</a:t>
-            </a:r>
-            <a:endParaRPr lang="en-US" sz="1400" dirty="0"/>
-          </a:p>
-        </p:txBody>
-      </p:sp>
-      <p:sp>
-        <p:nvSpPr>
-          <p:cNvPr id="21" name="Text 19"/>
-          <p:cNvSpPr/>
-          <p:nvPr/>
-        </p:nvSpPr>
-        <p:spPr>
-          <a:xfrm>
-            <a:off x="5577840" y="2057400"/>
-            <a:ext cx="3200400" cy="457200"/>
-          </a:xfrm>
-          <a:prstGeom prst="rect">
-            <a:avLst/>
-          </a:prstGeom>
-          <a:noFill/>
-          <a:ln/>
-        </p:spPr>
-        <p:txBody>
-          <a:bodyPr wrap="square" lIns="0" tIns="0" rIns="0" bIns="0" rtlCol="0" anchor="ctr"/>
-          <a:lstStyle/>
-          <a:p>
-            <a:pPr marL="0" indent="0">
-              <a:buNone/>
-            </a:pPr>
-            <a:r>
-              <a:rPr lang="en-US" sz="1050" dirty="0">
-                <a:solidFill>
-                  <a:srgbClr val="1E293B"/>
-                </a:solidFill>
-                <a:latin typeface="Calibri" pitchFamily="34" charset="0"/>
-                <a:ea typeface="Calibri" pitchFamily="34" charset="-122"/>
-                <a:cs typeface="Calibri" pitchFamily="34" charset="-120"/>
-              </a:rPr>
-              <a:t>PDF spec parsing (SAP → YAML → engine)</a:t>
-            </a:r>
-            <a:endParaRPr lang="en-US" sz="1050" dirty="0"/>
-          </a:p>
-        </p:txBody>
-      </p:sp>
-      <p:sp>
-        <p:nvSpPr>
-          <p:cNvPr id="22" name="Shape 20"/>
-          <p:cNvSpPr/>
-          <p:nvPr/>
-        </p:nvSpPr>
-        <p:spPr>
-          <a:xfrm>
-            <a:off x="5120640" y="2743200"/>
-            <a:ext cx="320040" cy="320040"/>
-          </a:xfrm>
-          <a:prstGeom prst="ellipse">
-            <a:avLst/>
-          </a:prstGeom>
-          <a:solidFill>
-            <a:srgbClr val="E86F33"/>
-          </a:solidFill>
-          <a:ln/>
-        </p:spPr>
-        <p:txBody>
-          <a:bodyPr/>
-          <a:lstStyle/>
-          <a:p>
-            <a:endParaRPr lang="en-CA"/>
-          </a:p>
-        </p:txBody>
-      </p:sp>
-      <p:sp>
-        <p:nvSpPr>
-          <p:cNvPr id="23" name="Text 21"/>
-          <p:cNvSpPr/>
-          <p:nvPr/>
-        </p:nvSpPr>
-        <p:spPr>
-          <a:xfrm>
-            <a:off x="5120640" y="2743200"/>
-            <a:ext cx="320040" cy="320040"/>
-          </a:xfrm>
-          <a:prstGeom prst="rect">
-            <a:avLst/>
-          </a:prstGeom>
-          <a:noFill/>
-          <a:ln/>
-        </p:spPr>
-        <p:txBody>
-          <a:bodyPr wrap="square" lIns="0" tIns="0" rIns="0" bIns="0" rtlCol="0" anchor="ctr"/>
-          <a:lstStyle/>
-          <a:p>
-            <a:pPr marL="0" indent="0" algn="ctr">
-              <a:buNone/>
-            </a:pPr>
-            <a:r>
-              <a:rPr lang="en-US" sz="1400" b="1" dirty="0">
-                <a:solidFill>
-                  <a:srgbClr val="FFFFFF"/>
-                </a:solidFill>
-                <a:latin typeface="Georgia" pitchFamily="34" charset="0"/>
-                <a:ea typeface="Georgia" pitchFamily="34" charset="-122"/>
-                <a:cs typeface="Georgia" pitchFamily="34" charset="-120"/>
-              </a:rPr>
-              <a:t>3</a:t>
-            </a:r>
-            <a:endParaRPr lang="en-US" sz="1400" dirty="0"/>
-          </a:p>
-        </p:txBody>
-      </p:sp>
-      <p:sp>
-        <p:nvSpPr>
-          <p:cNvPr id="24" name="Text 22"/>
-          <p:cNvSpPr/>
-          <p:nvPr/>
-        </p:nvSpPr>
-        <p:spPr>
-          <a:xfrm>
-            <a:off x="5577840" y="2697480"/>
-            <a:ext cx="3200400" cy="457200"/>
-          </a:xfrm>
-          <a:prstGeom prst="rect">
-            <a:avLst/>
-          </a:prstGeom>
-          <a:noFill/>
-          <a:ln/>
-        </p:spPr>
-        <p:txBody>
-          <a:bodyPr wrap="square" lIns="0" tIns="0" rIns="0" bIns="0" rtlCol="0" anchor="ctr"/>
-          <a:lstStyle/>
-          <a:p>
-            <a:pPr marL="0" indent="0">
-              <a:buNone/>
-            </a:pPr>
-            <a:r>
-              <a:rPr lang="en-US" sz="1050" dirty="0">
-                <a:solidFill>
-                  <a:srgbClr val="1E293B"/>
-                </a:solidFill>
-                <a:latin typeface="Calibri" pitchFamily="34" charset="0"/>
-                <a:ea typeface="Calibri" pitchFamily="34" charset="-122"/>
-                <a:cs typeface="Calibri" pitchFamily="34" charset="-120"/>
-              </a:rPr>
-              <a:t>Multi-study pattern learning (cross-study long-term memory)</a:t>
-            </a:r>
-            <a:endParaRPr lang="en-US" sz="1050" dirty="0"/>
-          </a:p>
-        </p:txBody>
-      </p:sp>
-      <p:sp>
-        <p:nvSpPr>
-          <p:cNvPr id="25" name="Shape 23"/>
-          <p:cNvSpPr/>
-          <p:nvPr/>
-        </p:nvSpPr>
-        <p:spPr>
-          <a:xfrm>
-            <a:off x="5120640" y="3383280"/>
-            <a:ext cx="320040" cy="320040"/>
-          </a:xfrm>
-          <a:prstGeom prst="ellipse">
-            <a:avLst/>
-          </a:prstGeom>
-          <a:solidFill>
-            <a:srgbClr val="E86F33"/>
-          </a:solidFill>
-          <a:ln/>
-        </p:spPr>
-        <p:txBody>
-          <a:bodyPr/>
-          <a:lstStyle/>
-          <a:p>
-            <a:endParaRPr lang="en-CA"/>
-          </a:p>
-        </p:txBody>
-      </p:sp>
-      <p:sp>
-        <p:nvSpPr>
-          <p:cNvPr id="26" name="Text 24"/>
-          <p:cNvSpPr/>
-          <p:nvPr/>
-        </p:nvSpPr>
-        <p:spPr>
-          <a:xfrm>
-            <a:off x="5120640" y="3383280"/>
-            <a:ext cx="320040" cy="320040"/>
-          </a:xfrm>
-          <a:prstGeom prst="rect">
-            <a:avLst/>
-          </a:prstGeom>
-          <a:noFill/>
-          <a:ln/>
-        </p:spPr>
-        <p:txBody>
-          <a:bodyPr wrap="square" lIns="0" tIns="0" rIns="0" bIns="0" rtlCol="0" anchor="ctr"/>
-          <a:lstStyle/>
-          <a:p>
-            <a:pPr marL="0" indent="0" algn="ctr">
-              <a:buNone/>
-            </a:pPr>
-            <a:r>
-              <a:rPr lang="en-US" sz="1400" b="1" dirty="0">
-                <a:solidFill>
-                  <a:srgbClr val="FFFFFF"/>
-                </a:solidFill>
-                <a:latin typeface="Georgia" pitchFamily="34" charset="0"/>
-                <a:ea typeface="Georgia" pitchFamily="34" charset="-122"/>
-                <a:cs typeface="Georgia" pitchFamily="34" charset="-120"/>
-              </a:rPr>
-              <a:t>4</a:t>
-            </a:r>
-            <a:endParaRPr lang="en-US" sz="1400" dirty="0"/>
-          </a:p>
-        </p:txBody>
-      </p:sp>
-      <p:sp>
-        <p:nvSpPr>
           <p:cNvPr id="27" name="Text 25"/>
           <p:cNvSpPr/>
           <p:nvPr/>
         </p:nvSpPr>
         <p:spPr>
           <a:xfrm>
-            <a:off x="5577840" y="3337560"/>
+            <a:off x="5577840" y="3113322"/>
             <a:ext cx="3200400" cy="457200"/>
           </a:xfrm>
           <a:prstGeom prst="rect">
@@ -23000,24 +22756,845 @@
           </a:p>
         </p:txBody>
       </p:sp>
-      <p:sp>
-        <p:nvSpPr>
-          <p:cNvPr id="29" name="Shape 16">
+      <p:grpSp>
+        <p:nvGrpSpPr>
+          <p:cNvPr id="42" name="Group 41">
             <a:extLst>
               <a:ext uri="{FF2B5EF4-FFF2-40B4-BE49-F238E27FC236}">
-                <a16:creationId xmlns:a16="http://schemas.microsoft.com/office/drawing/2014/main" id="{40F70658-BF88-F3A9-D0D7-E90BA7987573}"/>
+                <a16:creationId xmlns:a16="http://schemas.microsoft.com/office/drawing/2014/main" id="{C7B6BD03-A90E-89C1-5D2A-C0CCFCB5979F}"/>
               </a:ext>
             </a:extLst>
           </p:cNvPr>
-          <p:cNvSpPr/>
-          <p:nvPr/>
-        </p:nvSpPr>
-        <p:spPr>
-          <a:xfrm>
-            <a:off x="548640" y="1920240"/>
-            <a:ext cx="45719" cy="411480"/>
-          </a:xfrm>
-          <a:prstGeom prst="rect">
+          <p:cNvGrpSpPr/>
+          <p:nvPr/>
+        </p:nvGrpSpPr>
+        <p:grpSpPr>
+          <a:xfrm>
+            <a:off x="548640" y="1867992"/>
+            <a:ext cx="4206240" cy="411480"/>
+            <a:chOff x="548640" y="1920240"/>
+            <a:chExt cx="4206240" cy="411480"/>
+          </a:xfrm>
+        </p:grpSpPr>
+        <p:sp>
+          <p:nvSpPr>
+            <p:cNvPr id="7" name="Shape 5"/>
+            <p:cNvSpPr/>
+            <p:nvPr/>
+          </p:nvSpPr>
+          <p:spPr>
+            <a:xfrm>
+              <a:off x="548640" y="1920240"/>
+              <a:ext cx="4206240" cy="411480"/>
+            </a:xfrm>
+            <a:prstGeom prst="rect">
+              <a:avLst/>
+            </a:prstGeom>
+            <a:solidFill>
+              <a:srgbClr val="FFFFFF"/>
+            </a:solidFill>
+            <a:ln/>
+            <a:effectLst>
+              <a:outerShdw blurRad="50800" dist="25400" dir="8100000" algn="bl" rotWithShape="0">
+                <a:srgbClr val="000000">
+                  <a:alpha val="10000"/>
+                </a:srgbClr>
+              </a:outerShdw>
+            </a:effectLst>
+          </p:spPr>
+          <p:txBody>
+            <a:bodyPr/>
+            <a:lstStyle/>
+            <a:p>
+              <a:endParaRPr lang="en-CA"/>
+            </a:p>
+          </p:txBody>
+        </p:sp>
+        <p:sp>
+          <p:nvSpPr>
+            <p:cNvPr id="8" name="Text 6"/>
+            <p:cNvSpPr/>
+            <p:nvPr/>
+          </p:nvSpPr>
+          <p:spPr>
+            <a:xfrm>
+              <a:off x="731520" y="1920240"/>
+              <a:ext cx="3840480" cy="411480"/>
+            </a:xfrm>
+            <a:prstGeom prst="rect">
+              <a:avLst/>
+            </a:prstGeom>
+            <a:noFill/>
+            <a:ln/>
+          </p:spPr>
+          <p:txBody>
+            <a:bodyPr wrap="square" lIns="0" tIns="0" rIns="0" bIns="0" rtlCol="0" anchor="ctr"/>
+            <a:lstStyle/>
+            <a:p>
+              <a:pPr marL="0" indent="0">
+                <a:buNone/>
+              </a:pPr>
+              <a:r>
+                <a:rPr lang="en-US" sz="1050" dirty="0">
+                  <a:solidFill>
+                    <a:srgbClr val="1E293B"/>
+                  </a:solidFill>
+                  <a:latin typeface="Calibri" pitchFamily="34" charset="0"/>
+                  <a:ea typeface="Calibri" pitchFamily="34" charset="-122"/>
+                  <a:cs typeface="Calibri" pitchFamily="34" charset="-120"/>
+                </a:rPr>
+                <a:t>YAML specs only — production needs PDF/Word parsing, </a:t>
+              </a:r>
+              <a:r>
+                <a:rPr lang="en-US" sz="1050" dirty="0" err="1">
+                  <a:solidFill>
+                    <a:srgbClr val="1E293B"/>
+                  </a:solidFill>
+                  <a:latin typeface="Calibri" pitchFamily="34" charset="0"/>
+                  <a:ea typeface="Calibri" pitchFamily="34" charset="-122"/>
+                  <a:cs typeface="Calibri" pitchFamily="34" charset="-120"/>
+                </a:rPr>
+                <a:t>Spec_interpreter</a:t>
+              </a:r>
+              <a:r>
+                <a:rPr lang="en-US" sz="1050" dirty="0">
+                  <a:solidFill>
+                    <a:srgbClr val="1E293B"/>
+                  </a:solidFill>
+                  <a:latin typeface="Calibri" pitchFamily="34" charset="0"/>
+                  <a:ea typeface="Calibri" pitchFamily="34" charset="-122"/>
+                  <a:cs typeface="Calibri" pitchFamily="34" charset="-120"/>
+                </a:rPr>
+                <a:t> Agent not used as parsing YAML is deterministic</a:t>
+              </a:r>
+              <a:endParaRPr lang="en-US" sz="1050" dirty="0"/>
+            </a:p>
+          </p:txBody>
+        </p:sp>
+        <p:sp>
+          <p:nvSpPr>
+            <p:cNvPr id="29" name="Shape 16">
+              <a:extLst>
+                <a:ext uri="{FF2B5EF4-FFF2-40B4-BE49-F238E27FC236}">
+                  <a16:creationId xmlns:a16="http://schemas.microsoft.com/office/drawing/2014/main" id="{40F70658-BF88-F3A9-D0D7-E90BA7987573}"/>
+                </a:ext>
+              </a:extLst>
+            </p:cNvPr>
+            <p:cNvSpPr/>
+            <p:nvPr/>
+          </p:nvSpPr>
+          <p:spPr>
+            <a:xfrm>
+              <a:off x="548640" y="1920240"/>
+              <a:ext cx="45719" cy="411480"/>
+            </a:xfrm>
+            <a:prstGeom prst="rect">
+              <a:avLst/>
+            </a:prstGeom>
+            <a:solidFill>
+              <a:srgbClr val="E86F33"/>
+            </a:solidFill>
+            <a:ln/>
+          </p:spPr>
+          <p:txBody>
+            <a:bodyPr/>
+            <a:lstStyle/>
+            <a:p>
+              <a:endParaRPr lang="en-CA"/>
+            </a:p>
+          </p:txBody>
+        </p:sp>
+      </p:grpSp>
+      <p:grpSp>
+        <p:nvGrpSpPr>
+          <p:cNvPr id="43" name="Group 42">
+            <a:extLst>
+              <a:ext uri="{FF2B5EF4-FFF2-40B4-BE49-F238E27FC236}">
+                <a16:creationId xmlns:a16="http://schemas.microsoft.com/office/drawing/2014/main" id="{EB598D94-23A5-8F45-30C2-105225766D10}"/>
+              </a:ext>
+            </a:extLst>
+          </p:cNvPr>
+          <p:cNvGrpSpPr/>
+          <p:nvPr/>
+        </p:nvGrpSpPr>
+        <p:grpSpPr>
+          <a:xfrm>
+            <a:off x="548640" y="2318661"/>
+            <a:ext cx="4206240" cy="411480"/>
+            <a:chOff x="548640" y="2423160"/>
+            <a:chExt cx="4206240" cy="411480"/>
+          </a:xfrm>
+        </p:grpSpPr>
+        <p:sp>
+          <p:nvSpPr>
+            <p:cNvPr id="9" name="Shape 7"/>
+            <p:cNvSpPr/>
+            <p:nvPr/>
+          </p:nvSpPr>
+          <p:spPr>
+            <a:xfrm>
+              <a:off x="548640" y="2423160"/>
+              <a:ext cx="4206240" cy="411480"/>
+            </a:xfrm>
+            <a:prstGeom prst="rect">
+              <a:avLst/>
+            </a:prstGeom>
+            <a:solidFill>
+              <a:srgbClr val="FFFFFF"/>
+            </a:solidFill>
+            <a:ln/>
+            <a:effectLst>
+              <a:outerShdw blurRad="50800" dist="25400" dir="8100000" algn="bl" rotWithShape="0">
+                <a:srgbClr val="000000">
+                  <a:alpha val="10000"/>
+                </a:srgbClr>
+              </a:outerShdw>
+            </a:effectLst>
+          </p:spPr>
+          <p:txBody>
+            <a:bodyPr/>
+            <a:lstStyle/>
+            <a:p>
+              <a:endParaRPr lang="en-CA"/>
+            </a:p>
+          </p:txBody>
+        </p:sp>
+        <p:sp>
+          <p:nvSpPr>
+            <p:cNvPr id="10" name="Text 8"/>
+            <p:cNvSpPr/>
+            <p:nvPr/>
+          </p:nvSpPr>
+          <p:spPr>
+            <a:xfrm>
+              <a:off x="731520" y="2423160"/>
+              <a:ext cx="3840480" cy="411480"/>
+            </a:xfrm>
+            <a:prstGeom prst="rect">
+              <a:avLst/>
+            </a:prstGeom>
+            <a:noFill/>
+            <a:ln/>
+          </p:spPr>
+          <p:txBody>
+            <a:bodyPr wrap="square" lIns="0" tIns="0" rIns="0" bIns="0" rtlCol="0" anchor="ctr"/>
+            <a:lstStyle/>
+            <a:p>
+              <a:pPr marL="0" indent="0">
+                <a:buNone/>
+              </a:pPr>
+              <a:r>
+                <a:rPr lang="en-US" sz="1050" dirty="0">
+                  <a:solidFill>
+                    <a:srgbClr val="1E293B"/>
+                  </a:solidFill>
+                  <a:latin typeface="Calibri" pitchFamily="34" charset="0"/>
+                  <a:ea typeface="Calibri" pitchFamily="34" charset="-122"/>
+                  <a:cs typeface="Calibri" pitchFamily="34" charset="-120"/>
+                </a:rPr>
+                <a:t>Single study — memory architecture supports multi-study</a:t>
+              </a:r>
+              <a:endParaRPr lang="en-US" sz="1050" dirty="0"/>
+            </a:p>
+          </p:txBody>
+        </p:sp>
+        <p:sp>
+          <p:nvSpPr>
+            <p:cNvPr id="30" name="Shape 16">
+              <a:extLst>
+                <a:ext uri="{FF2B5EF4-FFF2-40B4-BE49-F238E27FC236}">
+                  <a16:creationId xmlns:a16="http://schemas.microsoft.com/office/drawing/2014/main" id="{AF80CC52-4E3C-D520-2AE5-CDA055884C1B}"/>
+                </a:ext>
+              </a:extLst>
+            </p:cNvPr>
+            <p:cNvSpPr/>
+            <p:nvPr/>
+          </p:nvSpPr>
+          <p:spPr>
+            <a:xfrm>
+              <a:off x="548640" y="2423160"/>
+              <a:ext cx="45719" cy="411480"/>
+            </a:xfrm>
+            <a:prstGeom prst="rect">
+              <a:avLst/>
+            </a:prstGeom>
+            <a:solidFill>
+              <a:srgbClr val="E86F33"/>
+            </a:solidFill>
+            <a:ln/>
+          </p:spPr>
+          <p:txBody>
+            <a:bodyPr/>
+            <a:lstStyle/>
+            <a:p>
+              <a:endParaRPr lang="en-CA"/>
+            </a:p>
+          </p:txBody>
+        </p:sp>
+      </p:grpSp>
+      <p:grpSp>
+        <p:nvGrpSpPr>
+          <p:cNvPr id="44" name="Group 43">
+            <a:extLst>
+              <a:ext uri="{FF2B5EF4-FFF2-40B4-BE49-F238E27FC236}">
+                <a16:creationId xmlns:a16="http://schemas.microsoft.com/office/drawing/2014/main" id="{E5350837-3FF9-43E2-EBE0-F29AA68EC7CC}"/>
+              </a:ext>
+            </a:extLst>
+          </p:cNvPr>
+          <p:cNvGrpSpPr/>
+          <p:nvPr/>
+        </p:nvGrpSpPr>
+        <p:grpSpPr>
+          <a:xfrm>
+            <a:off x="543560" y="2770777"/>
+            <a:ext cx="4211320" cy="416560"/>
+            <a:chOff x="543560" y="2921000"/>
+            <a:chExt cx="4211320" cy="416560"/>
+          </a:xfrm>
+        </p:grpSpPr>
+        <p:sp>
+          <p:nvSpPr>
+            <p:cNvPr id="11" name="Shape 9"/>
+            <p:cNvSpPr/>
+            <p:nvPr/>
+          </p:nvSpPr>
+          <p:spPr>
+            <a:xfrm>
+              <a:off x="548640" y="2926080"/>
+              <a:ext cx="4206240" cy="411480"/>
+            </a:xfrm>
+            <a:prstGeom prst="rect">
+              <a:avLst/>
+            </a:prstGeom>
+            <a:solidFill>
+              <a:srgbClr val="FFFFFF"/>
+            </a:solidFill>
+            <a:ln/>
+            <a:effectLst>
+              <a:outerShdw blurRad="50800" dist="25400" dir="8100000" algn="bl" rotWithShape="0">
+                <a:srgbClr val="000000">
+                  <a:alpha val="10000"/>
+                </a:srgbClr>
+              </a:outerShdw>
+            </a:effectLst>
+          </p:spPr>
+          <p:txBody>
+            <a:bodyPr/>
+            <a:lstStyle/>
+            <a:p>
+              <a:endParaRPr lang="en-CA"/>
+            </a:p>
+          </p:txBody>
+        </p:sp>
+        <p:sp>
+          <p:nvSpPr>
+            <p:cNvPr id="12" name="Text 10"/>
+            <p:cNvSpPr/>
+            <p:nvPr/>
+          </p:nvSpPr>
+          <p:spPr>
+            <a:xfrm>
+              <a:off x="731520" y="2926080"/>
+              <a:ext cx="3840480" cy="411480"/>
+            </a:xfrm>
+            <a:prstGeom prst="rect">
+              <a:avLst/>
+            </a:prstGeom>
+            <a:noFill/>
+            <a:ln/>
+          </p:spPr>
+          <p:txBody>
+            <a:bodyPr wrap="square" lIns="0" tIns="0" rIns="0" bIns="0" rtlCol="0" anchor="ctr"/>
+            <a:lstStyle/>
+            <a:p>
+              <a:pPr marL="0" indent="0">
+                <a:buNone/>
+              </a:pPr>
+              <a:r>
+                <a:rPr lang="en-US" sz="1050" dirty="0">
+                  <a:solidFill>
+                    <a:srgbClr val="1E293B"/>
+                  </a:solidFill>
+                  <a:latin typeface="Calibri" pitchFamily="34" charset="0"/>
+                  <a:ea typeface="Calibri" pitchFamily="34" charset="-122"/>
+                  <a:cs typeface="Calibri" pitchFamily="34" charset="-120"/>
+                </a:rPr>
+                <a:t>No CDISC conformance — Pinnacle 21 integration needed</a:t>
+              </a:r>
+              <a:endParaRPr lang="en-US" sz="1050" dirty="0"/>
+            </a:p>
+          </p:txBody>
+        </p:sp>
+        <p:sp>
+          <p:nvSpPr>
+            <p:cNvPr id="31" name="Shape 16">
+              <a:extLst>
+                <a:ext uri="{FF2B5EF4-FFF2-40B4-BE49-F238E27FC236}">
+                  <a16:creationId xmlns:a16="http://schemas.microsoft.com/office/drawing/2014/main" id="{991EBF2B-6031-2B99-27B5-EFC314B92BC8}"/>
+                </a:ext>
+              </a:extLst>
+            </p:cNvPr>
+            <p:cNvSpPr/>
+            <p:nvPr/>
+          </p:nvSpPr>
+          <p:spPr>
+            <a:xfrm>
+              <a:off x="543560" y="2921000"/>
+              <a:ext cx="45719" cy="411480"/>
+            </a:xfrm>
+            <a:prstGeom prst="rect">
+              <a:avLst/>
+            </a:prstGeom>
+            <a:solidFill>
+              <a:srgbClr val="E86F33"/>
+            </a:solidFill>
+            <a:ln/>
+          </p:spPr>
+          <p:txBody>
+            <a:bodyPr/>
+            <a:lstStyle/>
+            <a:p>
+              <a:endParaRPr lang="en-CA"/>
+            </a:p>
+          </p:txBody>
+        </p:sp>
+      </p:grpSp>
+      <p:grpSp>
+        <p:nvGrpSpPr>
+          <p:cNvPr id="45" name="Group 44">
+            <a:extLst>
+              <a:ext uri="{FF2B5EF4-FFF2-40B4-BE49-F238E27FC236}">
+                <a16:creationId xmlns:a16="http://schemas.microsoft.com/office/drawing/2014/main" id="{616EE783-418E-B28B-5E1D-8E40F094B5D9}"/>
+              </a:ext>
+            </a:extLst>
+          </p:cNvPr>
+          <p:cNvGrpSpPr/>
+          <p:nvPr/>
+        </p:nvGrpSpPr>
+        <p:grpSpPr>
+          <a:xfrm>
+            <a:off x="543560" y="3226534"/>
+            <a:ext cx="4211320" cy="411480"/>
+            <a:chOff x="543560" y="3429000"/>
+            <a:chExt cx="4211320" cy="411480"/>
+          </a:xfrm>
+        </p:grpSpPr>
+        <p:sp>
+          <p:nvSpPr>
+            <p:cNvPr id="13" name="Shape 11"/>
+            <p:cNvSpPr/>
+            <p:nvPr/>
+          </p:nvSpPr>
+          <p:spPr>
+            <a:xfrm>
+              <a:off x="548640" y="3429000"/>
+              <a:ext cx="4206240" cy="411480"/>
+            </a:xfrm>
+            <a:prstGeom prst="rect">
+              <a:avLst/>
+            </a:prstGeom>
+            <a:solidFill>
+              <a:srgbClr val="FFFFFF"/>
+            </a:solidFill>
+            <a:ln/>
+            <a:effectLst>
+              <a:outerShdw blurRad="50800" dist="25400" dir="8100000" algn="bl" rotWithShape="0">
+                <a:srgbClr val="000000">
+                  <a:alpha val="10000"/>
+                </a:srgbClr>
+              </a:outerShdw>
+            </a:effectLst>
+          </p:spPr>
+          <p:txBody>
+            <a:bodyPr/>
+            <a:lstStyle/>
+            <a:p>
+              <a:endParaRPr lang="en-CA"/>
+            </a:p>
+          </p:txBody>
+        </p:sp>
+        <p:sp>
+          <p:nvSpPr>
+            <p:cNvPr id="14" name="Text 12"/>
+            <p:cNvSpPr/>
+            <p:nvPr/>
+          </p:nvSpPr>
+          <p:spPr>
+            <a:xfrm>
+              <a:off x="731520" y="3429000"/>
+              <a:ext cx="3840480" cy="411480"/>
+            </a:xfrm>
+            <a:prstGeom prst="rect">
+              <a:avLst/>
+            </a:prstGeom>
+            <a:noFill/>
+            <a:ln/>
+          </p:spPr>
+          <p:txBody>
+            <a:bodyPr wrap="square" lIns="0" tIns="0" rIns="0" bIns="0" rtlCol="0" anchor="ctr"/>
+            <a:lstStyle/>
+            <a:p>
+              <a:r>
+                <a:rPr lang="en-US" sz="1050" dirty="0">
+                  <a:solidFill>
+                    <a:srgbClr val="1E293B"/>
+                  </a:solidFill>
+                  <a:latin typeface="Calibri" pitchFamily="34" charset="0"/>
+                  <a:ea typeface="Calibri" pitchFamily="34" charset="-122"/>
+                  <a:cs typeface="Calibri" pitchFamily="34" charset="-120"/>
+                </a:rPr>
+                <a:t>Current guards are rule-based (</a:t>
+              </a:r>
+              <a:r>
+                <a:rPr lang="en-US" sz="1050" dirty="0" err="1">
+                  <a:solidFill>
+                    <a:srgbClr val="1E293B"/>
+                  </a:solidFill>
+                  <a:latin typeface="Calibri" pitchFamily="34" charset="0"/>
+                  <a:ea typeface="Calibri" pitchFamily="34" charset="-122"/>
+                  <a:cs typeface="Calibri" pitchFamily="34" charset="-120"/>
+                </a:rPr>
+                <a:t>AgentLens</a:t>
+              </a:r>
+              <a:r>
+                <a:rPr lang="en-US" sz="1050" dirty="0">
+                  <a:solidFill>
+                    <a:srgbClr val="1E293B"/>
+                  </a:solidFill>
+                  <a:latin typeface="Calibri" pitchFamily="34" charset="0"/>
+                  <a:ea typeface="Calibri" pitchFamily="34" charset="-122"/>
+                  <a:cs typeface="Calibri" pitchFamily="34" charset="-120"/>
+                </a:rPr>
+                <a:t> proxy + custom rules)</a:t>
+              </a:r>
+              <a:endParaRPr lang="en-US" sz="1050" dirty="0"/>
+            </a:p>
+          </p:txBody>
+        </p:sp>
+        <p:sp>
+          <p:nvSpPr>
+            <p:cNvPr id="32" name="Shape 16">
+              <a:extLst>
+                <a:ext uri="{FF2B5EF4-FFF2-40B4-BE49-F238E27FC236}">
+                  <a16:creationId xmlns:a16="http://schemas.microsoft.com/office/drawing/2014/main" id="{1CE1AA4E-A771-0398-C044-5E54F255888A}"/>
+                </a:ext>
+              </a:extLst>
+            </p:cNvPr>
+            <p:cNvSpPr/>
+            <p:nvPr/>
+          </p:nvSpPr>
+          <p:spPr>
+            <a:xfrm>
+              <a:off x="543560" y="3429000"/>
+              <a:ext cx="45719" cy="411480"/>
+            </a:xfrm>
+            <a:prstGeom prst="rect">
+              <a:avLst/>
+            </a:prstGeom>
+            <a:solidFill>
+              <a:srgbClr val="E86F33"/>
+            </a:solidFill>
+            <a:ln/>
+          </p:spPr>
+          <p:txBody>
+            <a:bodyPr/>
+            <a:lstStyle/>
+            <a:p>
+              <a:endParaRPr lang="en-CA"/>
+            </a:p>
+          </p:txBody>
+        </p:sp>
+      </p:grpSp>
+      <p:grpSp>
+        <p:nvGrpSpPr>
+          <p:cNvPr id="46" name="Group 45">
+            <a:extLst>
+              <a:ext uri="{FF2B5EF4-FFF2-40B4-BE49-F238E27FC236}">
+                <a16:creationId xmlns:a16="http://schemas.microsoft.com/office/drawing/2014/main" id="{494A7E83-63E7-05CA-7D88-E74C07B99506}"/>
+              </a:ext>
+            </a:extLst>
+          </p:cNvPr>
+          <p:cNvGrpSpPr/>
+          <p:nvPr/>
+        </p:nvGrpSpPr>
+        <p:grpSpPr>
+          <a:xfrm>
+            <a:off x="542110" y="3686633"/>
+            <a:ext cx="4211320" cy="411480"/>
+            <a:chOff x="548641" y="3954418"/>
+            <a:chExt cx="4211320" cy="411480"/>
+          </a:xfrm>
+        </p:grpSpPr>
+        <p:sp>
+          <p:nvSpPr>
+            <p:cNvPr id="33" name="Shape 11">
+              <a:extLst>
+                <a:ext uri="{FF2B5EF4-FFF2-40B4-BE49-F238E27FC236}">
+                  <a16:creationId xmlns:a16="http://schemas.microsoft.com/office/drawing/2014/main" id="{19BB7EBD-337C-B42A-2561-AAD701DE82EA}"/>
+                </a:ext>
+              </a:extLst>
+            </p:cNvPr>
+            <p:cNvSpPr/>
+            <p:nvPr/>
+          </p:nvSpPr>
+          <p:spPr>
+            <a:xfrm>
+              <a:off x="553721" y="3954418"/>
+              <a:ext cx="4206240" cy="411480"/>
+            </a:xfrm>
+            <a:prstGeom prst="rect">
+              <a:avLst/>
+            </a:prstGeom>
+            <a:solidFill>
+              <a:srgbClr val="FFFFFF"/>
+            </a:solidFill>
+            <a:ln/>
+            <a:effectLst>
+              <a:outerShdw blurRad="50800" dist="25400" dir="8100000" algn="bl" rotWithShape="0">
+                <a:srgbClr val="000000">
+                  <a:alpha val="10000"/>
+                </a:srgbClr>
+              </a:outerShdw>
+            </a:effectLst>
+          </p:spPr>
+          <p:txBody>
+            <a:bodyPr/>
+            <a:lstStyle/>
+            <a:p>
+              <a:endParaRPr lang="en-CA"/>
+            </a:p>
+          </p:txBody>
+        </p:sp>
+        <p:sp>
+          <p:nvSpPr>
+            <p:cNvPr id="34" name="Text 12">
+              <a:extLst>
+                <a:ext uri="{FF2B5EF4-FFF2-40B4-BE49-F238E27FC236}">
+                  <a16:creationId xmlns:a16="http://schemas.microsoft.com/office/drawing/2014/main" id="{636C6FF1-B04D-9BD5-0290-B5FC0070E098}"/>
+                </a:ext>
+              </a:extLst>
+            </p:cNvPr>
+            <p:cNvSpPr/>
+            <p:nvPr/>
+          </p:nvSpPr>
+          <p:spPr>
+            <a:xfrm>
+              <a:off x="736601" y="3954418"/>
+              <a:ext cx="3840480" cy="411480"/>
+            </a:xfrm>
+            <a:prstGeom prst="rect">
+              <a:avLst/>
+            </a:prstGeom>
+            <a:noFill/>
+            <a:ln/>
+          </p:spPr>
+          <p:txBody>
+            <a:bodyPr wrap="square" lIns="0" tIns="0" rIns="0" bIns="0" rtlCol="0" anchor="ctr"/>
+            <a:lstStyle/>
+            <a:p>
+              <a:r>
+                <a:rPr lang="en-US" sz="1050" dirty="0">
+                  <a:solidFill>
+                    <a:srgbClr val="1E293B"/>
+                  </a:solidFill>
+                  <a:latin typeface="Calibri" pitchFamily="34" charset="0"/>
+                  <a:ea typeface="Calibri" pitchFamily="34" charset="-122"/>
+                  <a:cs typeface="Calibri" pitchFamily="34" charset="-120"/>
+                </a:rPr>
+                <a:t>Resume action for workflow not implemented, only rerun</a:t>
+              </a:r>
+              <a:endParaRPr lang="en-US" sz="1050" dirty="0"/>
+            </a:p>
+          </p:txBody>
+        </p:sp>
+        <p:sp>
+          <p:nvSpPr>
+            <p:cNvPr id="35" name="Shape 16">
+              <a:extLst>
+                <a:ext uri="{FF2B5EF4-FFF2-40B4-BE49-F238E27FC236}">
+                  <a16:creationId xmlns:a16="http://schemas.microsoft.com/office/drawing/2014/main" id="{883A2CC2-E9B7-4180-8B95-16116713FE4E}"/>
+                </a:ext>
+              </a:extLst>
+            </p:cNvPr>
+            <p:cNvSpPr/>
+            <p:nvPr/>
+          </p:nvSpPr>
+          <p:spPr>
+            <a:xfrm>
+              <a:off x="548641" y="3954418"/>
+              <a:ext cx="45719" cy="411480"/>
+            </a:xfrm>
+            <a:prstGeom prst="rect">
+              <a:avLst/>
+            </a:prstGeom>
+            <a:solidFill>
+              <a:srgbClr val="E86F33"/>
+            </a:solidFill>
+            <a:ln/>
+          </p:spPr>
+          <p:txBody>
+            <a:bodyPr/>
+            <a:lstStyle/>
+            <a:p>
+              <a:endParaRPr lang="en-CA"/>
+            </a:p>
+          </p:txBody>
+        </p:sp>
+      </p:grpSp>
+      <p:grpSp>
+        <p:nvGrpSpPr>
+          <p:cNvPr id="47" name="Group 46">
+            <a:extLst>
+              <a:ext uri="{FF2B5EF4-FFF2-40B4-BE49-F238E27FC236}">
+                <a16:creationId xmlns:a16="http://schemas.microsoft.com/office/drawing/2014/main" id="{38C6D4DE-40A9-6C5D-D7D1-8EFD29E7A567}"/>
+              </a:ext>
+            </a:extLst>
+          </p:cNvPr>
+          <p:cNvGrpSpPr/>
+          <p:nvPr/>
+        </p:nvGrpSpPr>
+        <p:grpSpPr>
+          <a:xfrm>
+            <a:off x="543561" y="4135847"/>
+            <a:ext cx="4211320" cy="411480"/>
+            <a:chOff x="543561" y="4475480"/>
+            <a:chExt cx="4211320" cy="411480"/>
+          </a:xfrm>
+        </p:grpSpPr>
+        <p:sp>
+          <p:nvSpPr>
+            <p:cNvPr id="36" name="Shape 11">
+              <a:extLst>
+                <a:ext uri="{FF2B5EF4-FFF2-40B4-BE49-F238E27FC236}">
+                  <a16:creationId xmlns:a16="http://schemas.microsoft.com/office/drawing/2014/main" id="{4680328F-EE43-962F-9908-EC3EEDFD792B}"/>
+                </a:ext>
+              </a:extLst>
+            </p:cNvPr>
+            <p:cNvSpPr/>
+            <p:nvPr/>
+          </p:nvSpPr>
+          <p:spPr>
+            <a:xfrm>
+              <a:off x="548641" y="4475480"/>
+              <a:ext cx="4206240" cy="411480"/>
+            </a:xfrm>
+            <a:prstGeom prst="rect">
+              <a:avLst/>
+            </a:prstGeom>
+            <a:solidFill>
+              <a:srgbClr val="FFFFFF"/>
+            </a:solidFill>
+            <a:ln/>
+            <a:effectLst>
+              <a:outerShdw blurRad="50800" dist="25400" dir="8100000" algn="bl" rotWithShape="0">
+                <a:srgbClr val="000000">
+                  <a:alpha val="10000"/>
+                </a:srgbClr>
+              </a:outerShdw>
+            </a:effectLst>
+          </p:spPr>
+          <p:txBody>
+            <a:bodyPr/>
+            <a:lstStyle/>
+            <a:p>
+              <a:endParaRPr lang="en-CA"/>
+            </a:p>
+          </p:txBody>
+        </p:sp>
+        <p:sp>
+          <p:nvSpPr>
+            <p:cNvPr id="37" name="Text 12">
+              <a:extLst>
+                <a:ext uri="{FF2B5EF4-FFF2-40B4-BE49-F238E27FC236}">
+                  <a16:creationId xmlns:a16="http://schemas.microsoft.com/office/drawing/2014/main" id="{4812FE6A-2D69-5EA1-F563-EBE455D3AAA0}"/>
+                </a:ext>
+              </a:extLst>
+            </p:cNvPr>
+            <p:cNvSpPr/>
+            <p:nvPr/>
+          </p:nvSpPr>
+          <p:spPr>
+            <a:xfrm>
+              <a:off x="731521" y="4475480"/>
+              <a:ext cx="3840480" cy="411480"/>
+            </a:xfrm>
+            <a:prstGeom prst="rect">
+              <a:avLst/>
+            </a:prstGeom>
+            <a:noFill/>
+            <a:ln/>
+          </p:spPr>
+          <p:txBody>
+            <a:bodyPr wrap="square" lIns="0" tIns="0" rIns="0" bIns="0" rtlCol="0" anchor="ctr"/>
+            <a:lstStyle/>
+            <a:p>
+              <a:r>
+                <a:rPr lang="en-US" sz="1050" dirty="0">
+                  <a:solidFill>
+                    <a:srgbClr val="1E293B"/>
+                  </a:solidFill>
+                  <a:latin typeface="Calibri" pitchFamily="34" charset="0"/>
+                  <a:ea typeface="Calibri" pitchFamily="34" charset="-122"/>
+                  <a:cs typeface="Calibri" pitchFamily="34" charset="-120"/>
+                </a:rPr>
+                <a:t>Debugger Agent doesn’t delegate back but fixes</a:t>
+              </a:r>
+              <a:endParaRPr lang="en-US" sz="1050" dirty="0"/>
+            </a:p>
+          </p:txBody>
+        </p:sp>
+        <p:sp>
+          <p:nvSpPr>
+            <p:cNvPr id="38" name="Shape 16">
+              <a:extLst>
+                <a:ext uri="{FF2B5EF4-FFF2-40B4-BE49-F238E27FC236}">
+                  <a16:creationId xmlns:a16="http://schemas.microsoft.com/office/drawing/2014/main" id="{F343EEFE-9436-E858-6E18-3DBD184B4CB2}"/>
+                </a:ext>
+              </a:extLst>
+            </p:cNvPr>
+            <p:cNvSpPr/>
+            <p:nvPr/>
+          </p:nvSpPr>
+          <p:spPr>
+            <a:xfrm>
+              <a:off x="543561" y="4475480"/>
+              <a:ext cx="45719" cy="411480"/>
+            </a:xfrm>
+            <a:prstGeom prst="rect">
+              <a:avLst/>
+            </a:prstGeom>
+            <a:solidFill>
+              <a:srgbClr val="E86F33"/>
+            </a:solidFill>
+            <a:ln/>
+          </p:spPr>
+          <p:txBody>
+            <a:bodyPr/>
+            <a:lstStyle/>
+            <a:p>
+              <a:endParaRPr lang="en-CA"/>
+            </a:p>
+          </p:txBody>
+        </p:sp>
+      </p:grpSp>
+      <p:sp>
+        <p:nvSpPr>
+          <p:cNvPr id="39" name="Shape 23">
+            <a:extLst>
+              <a:ext uri="{FF2B5EF4-FFF2-40B4-BE49-F238E27FC236}">
+                <a16:creationId xmlns:a16="http://schemas.microsoft.com/office/drawing/2014/main" id="{1DE4E712-AA11-03DE-E711-0C540238C050}"/>
+              </a:ext>
+            </a:extLst>
+          </p:cNvPr>
+          <p:cNvSpPr/>
+          <p:nvPr/>
+        </p:nvSpPr>
+        <p:spPr>
+          <a:xfrm>
+            <a:off x="5135880" y="3770087"/>
+            <a:ext cx="320040" cy="320040"/>
+          </a:xfrm>
+          <a:prstGeom prst="ellipse">
             <a:avLst/>
           </a:prstGeom>
           <a:solidFill>
@@ -23035,10 +23612,10 @@
       </p:sp>
       <p:sp>
         <p:nvSpPr>
-          <p:cNvPr id="30" name="Shape 16">
+          <p:cNvPr id="40" name="Text 24">
             <a:extLst>
               <a:ext uri="{FF2B5EF4-FFF2-40B4-BE49-F238E27FC236}">
-                <a16:creationId xmlns:a16="http://schemas.microsoft.com/office/drawing/2014/main" id="{AF80CC52-4E3C-D520-2AE5-CDA055884C1B}"/>
+                <a16:creationId xmlns:a16="http://schemas.microsoft.com/office/drawing/2014/main" id="{11F66936-E212-6063-0096-CF6ED5AC7F7D}"/>
               </a:ext>
             </a:extLst>
           </p:cNvPr>
@@ -23047,10 +23624,236 @@
         </p:nvSpPr>
         <p:spPr>
           <a:xfrm>
-            <a:off x="548640" y="2423160"/>
-            <a:ext cx="45719" cy="411480"/>
-          </a:xfrm>
-          <a:prstGeom prst="rect">
+            <a:off x="5135880" y="3770087"/>
+            <a:ext cx="320040" cy="320040"/>
+          </a:xfrm>
+          <a:prstGeom prst="rect">
+            <a:avLst/>
+          </a:prstGeom>
+          <a:noFill/>
+          <a:ln/>
+        </p:spPr>
+        <p:txBody>
+          <a:bodyPr wrap="square" lIns="0" tIns="0" rIns="0" bIns="0" rtlCol="0" anchor="ctr"/>
+          <a:lstStyle/>
+          <a:p>
+            <a:pPr marL="0" indent="0" algn="ctr">
+              <a:buNone/>
+            </a:pPr>
+            <a:r>
+              <a:rPr lang="en-US" sz="1400" b="1" dirty="0">
+                <a:solidFill>
+                  <a:srgbClr val="FFFFFF"/>
+                </a:solidFill>
+                <a:latin typeface="Georgia" pitchFamily="34" charset="0"/>
+                <a:ea typeface="Georgia" pitchFamily="34" charset="-122"/>
+                <a:cs typeface="Georgia" pitchFamily="34" charset="-120"/>
+              </a:rPr>
+              <a:t>5</a:t>
+            </a:r>
+            <a:endParaRPr lang="en-US" sz="1400" dirty="0"/>
+          </a:p>
+        </p:txBody>
+      </p:sp>
+      <p:sp>
+        <p:nvSpPr>
+          <p:cNvPr id="41" name="Text 25">
+            <a:extLst>
+              <a:ext uri="{FF2B5EF4-FFF2-40B4-BE49-F238E27FC236}">
+                <a16:creationId xmlns:a16="http://schemas.microsoft.com/office/drawing/2014/main" id="{259D5D90-7638-D0E3-8787-8C325BA2A4F0}"/>
+              </a:ext>
+            </a:extLst>
+          </p:cNvPr>
+          <p:cNvSpPr/>
+          <p:nvPr/>
+        </p:nvSpPr>
+        <p:spPr>
+          <a:xfrm>
+            <a:off x="5593080" y="3694614"/>
+            <a:ext cx="3200400" cy="457200"/>
+          </a:xfrm>
+          <a:prstGeom prst="rect">
+            <a:avLst/>
+          </a:prstGeom>
+          <a:noFill/>
+          <a:ln/>
+        </p:spPr>
+        <p:txBody>
+          <a:bodyPr wrap="square" lIns="0" tIns="0" rIns="0" bIns="0" rtlCol="0" anchor="ctr"/>
+          <a:lstStyle/>
+          <a:p>
+            <a:pPr marL="0" indent="0">
+              <a:buNone/>
+            </a:pPr>
+            <a:r>
+              <a:rPr lang="en-US" sz="1050" dirty="0">
+                <a:solidFill>
+                  <a:srgbClr val="1E293B"/>
+                </a:solidFill>
+                <a:latin typeface="Calibri" pitchFamily="34" charset="0"/>
+                <a:ea typeface="Calibri" pitchFamily="34" charset="-122"/>
+                <a:cs typeface="Calibri" pitchFamily="34" charset="-120"/>
+              </a:rPr>
+              <a:t>Implement Workflow resume (checkpoints already done) and Debugger loop-back call</a:t>
+            </a:r>
+            <a:endParaRPr lang="en-US" sz="1050" dirty="0"/>
+          </a:p>
+        </p:txBody>
+      </p:sp>
+      <p:grpSp>
+        <p:nvGrpSpPr>
+          <p:cNvPr id="48" name="Group 47">
+            <a:extLst>
+              <a:ext uri="{FF2B5EF4-FFF2-40B4-BE49-F238E27FC236}">
+                <a16:creationId xmlns:a16="http://schemas.microsoft.com/office/drawing/2014/main" id="{D6CF0AA7-A1CB-B22F-64D6-5A5DDC05B136}"/>
+              </a:ext>
+            </a:extLst>
+          </p:cNvPr>
+          <p:cNvGrpSpPr/>
+          <p:nvPr/>
+        </p:nvGrpSpPr>
+        <p:grpSpPr>
+          <a:xfrm>
+            <a:off x="542471" y="4584336"/>
+            <a:ext cx="4211320" cy="411480"/>
+            <a:chOff x="543561" y="4475480"/>
+            <a:chExt cx="4211320" cy="411480"/>
+          </a:xfrm>
+        </p:grpSpPr>
+        <p:sp>
+          <p:nvSpPr>
+            <p:cNvPr id="49" name="Shape 11">
+              <a:extLst>
+                <a:ext uri="{FF2B5EF4-FFF2-40B4-BE49-F238E27FC236}">
+                  <a16:creationId xmlns:a16="http://schemas.microsoft.com/office/drawing/2014/main" id="{654EDAE4-B964-9AC0-22E8-4DFE2407349F}"/>
+                </a:ext>
+              </a:extLst>
+            </p:cNvPr>
+            <p:cNvSpPr/>
+            <p:nvPr/>
+          </p:nvSpPr>
+          <p:spPr>
+            <a:xfrm>
+              <a:off x="548641" y="4475480"/>
+              <a:ext cx="4206240" cy="411480"/>
+            </a:xfrm>
+            <a:prstGeom prst="rect">
+              <a:avLst/>
+            </a:prstGeom>
+            <a:solidFill>
+              <a:srgbClr val="FFFFFF"/>
+            </a:solidFill>
+            <a:ln/>
+            <a:effectLst>
+              <a:outerShdw blurRad="50800" dist="25400" dir="8100000" algn="bl" rotWithShape="0">
+                <a:srgbClr val="000000">
+                  <a:alpha val="10000"/>
+                </a:srgbClr>
+              </a:outerShdw>
+            </a:effectLst>
+          </p:spPr>
+          <p:txBody>
+            <a:bodyPr/>
+            <a:lstStyle/>
+            <a:p>
+              <a:endParaRPr lang="en-CA"/>
+            </a:p>
+          </p:txBody>
+        </p:sp>
+        <p:sp>
+          <p:nvSpPr>
+            <p:cNvPr id="50" name="Text 12">
+              <a:extLst>
+                <a:ext uri="{FF2B5EF4-FFF2-40B4-BE49-F238E27FC236}">
+                  <a16:creationId xmlns:a16="http://schemas.microsoft.com/office/drawing/2014/main" id="{DE3A42F8-729F-8CAD-86EF-B5ACF3676CEC}"/>
+                </a:ext>
+              </a:extLst>
+            </p:cNvPr>
+            <p:cNvSpPr/>
+            <p:nvPr/>
+          </p:nvSpPr>
+          <p:spPr>
+            <a:xfrm>
+              <a:off x="731521" y="4475480"/>
+              <a:ext cx="3840480" cy="411480"/>
+            </a:xfrm>
+            <a:prstGeom prst="rect">
+              <a:avLst/>
+            </a:prstGeom>
+            <a:noFill/>
+            <a:ln/>
+          </p:spPr>
+          <p:txBody>
+            <a:bodyPr wrap="square" lIns="0" tIns="0" rIns="0" bIns="0" rtlCol="0" anchor="ctr"/>
+            <a:lstStyle/>
+            <a:p>
+              <a:r>
+                <a:rPr lang="en-US" sz="1050" dirty="0">
+                  <a:solidFill>
+                    <a:srgbClr val="1E293B"/>
+                  </a:solidFill>
+                  <a:latin typeface="Calibri" pitchFamily="34" charset="0"/>
+                  <a:ea typeface="Calibri" pitchFamily="34" charset="-122"/>
+                  <a:cs typeface="Calibri" pitchFamily="34" charset="-120"/>
+                </a:rPr>
+                <a:t>HITL UX is oversimplified to pass regulations</a:t>
+              </a:r>
+              <a:endParaRPr lang="en-US" sz="1050" dirty="0"/>
+            </a:p>
+          </p:txBody>
+        </p:sp>
+        <p:sp>
+          <p:nvSpPr>
+            <p:cNvPr id="51" name="Shape 16">
+              <a:extLst>
+                <a:ext uri="{FF2B5EF4-FFF2-40B4-BE49-F238E27FC236}">
+                  <a16:creationId xmlns:a16="http://schemas.microsoft.com/office/drawing/2014/main" id="{CD5DA80D-7285-45A1-BDBB-2F186666FDEA}"/>
+                </a:ext>
+              </a:extLst>
+            </p:cNvPr>
+            <p:cNvSpPr/>
+            <p:nvPr/>
+          </p:nvSpPr>
+          <p:spPr>
+            <a:xfrm>
+              <a:off x="543561" y="4475480"/>
+              <a:ext cx="45719" cy="411480"/>
+            </a:xfrm>
+            <a:prstGeom prst="rect">
+              <a:avLst/>
+            </a:prstGeom>
+            <a:solidFill>
+              <a:srgbClr val="E86F33"/>
+            </a:solidFill>
+            <a:ln/>
+          </p:spPr>
+          <p:txBody>
+            <a:bodyPr/>
+            <a:lstStyle/>
+            <a:p>
+              <a:endParaRPr lang="en-CA"/>
+            </a:p>
+          </p:txBody>
+        </p:sp>
+      </p:grpSp>
+      <p:sp>
+        <p:nvSpPr>
+          <p:cNvPr id="52" name="Shape 23">
+            <a:extLst>
+              <a:ext uri="{FF2B5EF4-FFF2-40B4-BE49-F238E27FC236}">
+                <a16:creationId xmlns:a16="http://schemas.microsoft.com/office/drawing/2014/main" id="{096D85FC-2802-860E-C140-53DF8ACA1EB0}"/>
+              </a:ext>
+            </a:extLst>
+          </p:cNvPr>
+          <p:cNvSpPr/>
+          <p:nvPr/>
+        </p:nvSpPr>
+        <p:spPr>
+          <a:xfrm>
+            <a:off x="5135880" y="4318000"/>
+            <a:ext cx="320040" cy="320040"/>
+          </a:xfrm>
+          <a:prstGeom prst="ellipse">
             <a:avLst/>
           </a:prstGeom>
           <a:solidFill>
@@ -23068,10 +23871,10 @@
       </p:sp>
       <p:sp>
         <p:nvSpPr>
-          <p:cNvPr id="31" name="Shape 16">
+          <p:cNvPr id="53" name="Text 24">
             <a:extLst>
               <a:ext uri="{FF2B5EF4-FFF2-40B4-BE49-F238E27FC236}">
-                <a16:creationId xmlns:a16="http://schemas.microsoft.com/office/drawing/2014/main" id="{991EBF2B-6031-2B99-27B5-EFC314B92BC8}"/>
+                <a16:creationId xmlns:a16="http://schemas.microsoft.com/office/drawing/2014/main" id="{E5CC9B44-7E68-C8C0-8FE0-4D97B0B45CD7}"/>
               </a:ext>
             </a:extLst>
           </p:cNvPr>
@@ -23080,31 +23883,41 @@
         </p:nvSpPr>
         <p:spPr>
           <a:xfrm>
-            <a:off x="543560" y="2921000"/>
-            <a:ext cx="45719" cy="411480"/>
-          </a:xfrm>
-          <a:prstGeom prst="rect">
-            <a:avLst/>
-          </a:prstGeom>
-          <a:solidFill>
-            <a:srgbClr val="E86F33"/>
-          </a:solidFill>
-          <a:ln/>
-        </p:spPr>
-        <p:txBody>
-          <a:bodyPr/>
-          <a:lstStyle/>
-          <a:p>
-            <a:endParaRPr lang="en-CA"/>
-          </a:p>
-        </p:txBody>
-      </p:sp>
-      <p:sp>
-        <p:nvSpPr>
-          <p:cNvPr id="32" name="Shape 16">
+            <a:off x="5135880" y="4318000"/>
+            <a:ext cx="320040" cy="320040"/>
+          </a:xfrm>
+          <a:prstGeom prst="rect">
+            <a:avLst/>
+          </a:prstGeom>
+          <a:noFill/>
+          <a:ln/>
+        </p:spPr>
+        <p:txBody>
+          <a:bodyPr wrap="square" lIns="0" tIns="0" rIns="0" bIns="0" rtlCol="0" anchor="ctr"/>
+          <a:lstStyle/>
+          <a:p>
+            <a:pPr marL="0" indent="0" algn="ctr">
+              <a:buNone/>
+            </a:pPr>
+            <a:r>
+              <a:rPr lang="en-US" sz="1400" b="1" dirty="0">
+                <a:solidFill>
+                  <a:srgbClr val="FFFFFF"/>
+                </a:solidFill>
+                <a:latin typeface="Georgia" pitchFamily="34" charset="0"/>
+              </a:rPr>
+              <a:t>6</a:t>
+            </a:r>
+            <a:endParaRPr lang="en-US" sz="1400" dirty="0"/>
+          </a:p>
+        </p:txBody>
+      </p:sp>
+      <p:sp>
+        <p:nvSpPr>
+          <p:cNvPr id="54" name="Text 25">
             <a:extLst>
               <a:ext uri="{FF2B5EF4-FFF2-40B4-BE49-F238E27FC236}">
-                <a16:creationId xmlns:a16="http://schemas.microsoft.com/office/drawing/2014/main" id="{1CE1AA4E-A771-0398-C044-5E54F255888A}"/>
+                <a16:creationId xmlns:a16="http://schemas.microsoft.com/office/drawing/2014/main" id="{5928A624-2272-B8FA-956E-7D041DFC3BAD}"/>
               </a:ext>
             </a:extLst>
           </p:cNvPr>
@@ -23113,22 +23926,31 @@
         </p:nvSpPr>
         <p:spPr>
           <a:xfrm>
-            <a:off x="543560" y="3429000"/>
-            <a:ext cx="45719" cy="411480"/>
-          </a:xfrm>
-          <a:prstGeom prst="rect">
-            <a:avLst/>
-          </a:prstGeom>
-          <a:solidFill>
-            <a:srgbClr val="E86F33"/>
-          </a:solidFill>
-          <a:ln/>
-        </p:spPr>
-        <p:txBody>
-          <a:bodyPr/>
-          <a:lstStyle/>
-          <a:p>
-            <a:endParaRPr lang="en-CA"/>
+            <a:off x="5593080" y="4242527"/>
+            <a:ext cx="3200400" cy="457200"/>
+          </a:xfrm>
+          <a:prstGeom prst="rect">
+            <a:avLst/>
+          </a:prstGeom>
+          <a:noFill/>
+          <a:ln/>
+        </p:spPr>
+        <p:txBody>
+          <a:bodyPr wrap="square" lIns="0" tIns="0" rIns="0" bIns="0" rtlCol="0" anchor="ctr"/>
+          <a:lstStyle/>
+          <a:p>
+            <a:r>
+              <a:rPr lang="en-US" sz="1050" dirty="0">
+                <a:solidFill>
+                  <a:srgbClr val="1E293B"/>
+                </a:solidFill>
+                <a:latin typeface="Calibri" pitchFamily="34" charset="0"/>
+                <a:ea typeface="Calibri" pitchFamily="34" charset="-122"/>
+                <a:cs typeface="Calibri" pitchFamily="34" charset="-120"/>
+              </a:rPr>
+              <a:t>Add Validation LLM, Role base routing and 21 CFR Part 11 e-signature compliance for HITL</a:t>
+            </a:r>
+            <a:endParaRPr lang="en-US" sz="1050" dirty="0"/>
           </a:p>
         </p:txBody>
       </p:sp>
